--- a/スライド/ch01.pptx
+++ b/スライド/ch01.pptx
@@ -613,13 +613,13 @@
           <a:lstStyle/>
           <a:p>
             <a:r>
-              <a:t>段階開示。①で「捨てる熱はゼロにできない」を強調。②③は 1 行ずつ。これが第二法則の帰結。</a:t>
+              <a:t>②を追加。ここで「W = Q_H にはならない」ことが確定する。</a:t>
             </a:r>
           </a:p>
           <a:p/>
           <a:p>
             <a:r>
-              <a:t>_class: sections</a:t>
+              <a:t>_class: figure-full</a:t>
             </a:r>
           </a:p>
         </p:txBody>
@@ -689,13 +689,13 @@
           <a:lstStyle/>
           <a:p>
             <a:r>
-              <a:t>段階開示。①で「捨てる熱はゼロにできない」を強調。②③は 1 行ずつ。これが第二法則の帰結。</a:t>
+              <a:t>③で結論。実機がカルノー上限の 6〜7 割しか出ないのは、この先の非可逆性の話。</a:t>
             </a:r>
           </a:p>
           <a:p/>
           <a:p>
             <a:r>
-              <a:t>_class: sections</a:t>
+              <a:t>_class: figure-full</a:t>
             </a:r>
           </a:p>
         </p:txBody>
@@ -3107,13 +3107,13 @@
           <a:lstStyle/>
           <a:p>
             <a:r>
-              <a:t>段階開示。①で「捨てる熱はゼロにできない」を強調。②③は 1 行ずつ。これが第二法則の帰結。</a:t>
+              <a:t>まず①だけを出す。「捨てる熱はゼロにできない」をここで強調しておく。</a:t>
             </a:r>
           </a:p>
           <a:p/>
           <a:p>
             <a:r>
-              <a:t>_class: sections</a:t>
+              <a:t>_class: figure-full</a:t>
             </a:r>
           </a:p>
         </p:txBody>
@@ -7074,59 +7074,14 @@
       <p:grpSpPr/>
       <p:sp>
         <p:nvSpPr>
-          <p:cNvPr id="2" name="TextBox 1"/>
+          <p:cNvPr id="2" name="edge:title"/>
           <p:cNvSpPr txBox="1"/>
           <p:nvPr/>
         </p:nvSpPr>
         <p:spPr>
           <a:xfrm>
-            <a:off x="566928" y="457200"/>
-            <a:ext cx="11057839" cy="658368"/>
-          </a:xfrm>
-          <a:prstGeom prst="rect">
-            <a:avLst/>
-          </a:prstGeom>
-          <a:noFill/>
-        </p:spPr>
-        <p:txBody>
-          <a:bodyPr wrap="square" lIns="0" rIns="0" tIns="0" bIns="0" anchor="ctr">
-            <a:noAutofit/>
-          </a:bodyPr>
-          <a:lstStyle/>
-          <a:p>
-            <a:pPr>
-              <a:lnSpc>
-                <a:spcPct val="106000"/>
-              </a:lnSpc>
-              <a:defRPr sz="3390" b="1">
-                <a:solidFill>
-                  <a:srgbClr val="7C332A"/>
-                </a:solidFill>
-                <a:latin typeface="Avenir Next"/>
-                <a:ea typeface="Hiragino Sans"/>
-                <a:cs typeface="Hiragino Sans"/>
-              </a:defRPr>
-            </a:pPr>
-            <a:r>
-              <a:rPr>
-                <a:ea typeface="Hiragino Sans"/>
-                <a:cs typeface="Hiragino Sans"/>
-              </a:rPr>
-              <a:t>導出 — なぜ熱機関の効率に上限があるのか</a:t>
-            </a:r>
-          </a:p>
-        </p:txBody>
-      </p:sp>
-      <p:sp>
-        <p:nvSpPr>
-          <p:cNvPr id="3" name="TextBox 2"/>
-          <p:cNvSpPr txBox="1"/>
-          <p:nvPr/>
-        </p:nvSpPr>
-        <p:spPr>
-          <a:xfrm>
-            <a:off x="566928" y="2384775"/>
-            <a:ext cx="11057839" cy="254000"/>
+            <a:off x="566928" y="146304"/>
+            <a:ext cx="11057839" cy="457200"/>
           </a:xfrm>
           <a:prstGeom prst="rect">
             <a:avLst/>
@@ -7139,30 +7094,60 @@
           </a:bodyPr>
           <a:lstStyle/>
           <a:p>
-            <a:r>
-              <a:rPr sz="1600" b="1">
-                <a:solidFill>
-                  <a:srgbClr val="5C7268"/>
-                </a:solidFill>
-                <a:latin typeface="Avenir Next"/>
-                <a:ea typeface="Hiragino Sans"/>
-                <a:cs typeface="Hiragino Sans"/>
-              </a:rPr>
-              <a:t>① エントロピー収支｜可逆サイクルは 1 周で元に戻る</a:t>
-            </a:r>
-          </a:p>
-        </p:txBody>
-      </p:sp>
-      <p:sp>
-        <p:nvSpPr>
-          <p:cNvPr id="4" name="TextBox 3"/>
+            <a:pPr>
+              <a:defRPr sz="2400" b="1">
+                <a:solidFill>
+                  <a:srgbClr val="7C332A"/>
+                </a:solidFill>
+                <a:latin typeface="Avenir Next"/>
+                <a:ea typeface="Hiragino Sans"/>
+                <a:cs typeface="Hiragino Sans"/>
+              </a:defRPr>
+            </a:pPr>
+            <a:r>
+              <a:rPr>
+                <a:ea typeface="Hiragino Sans"/>
+                <a:cs typeface="Hiragino Sans"/>
+              </a:rPr>
+              <a:t>導出 — なぜ熱機関の効率に上限があるのか</a:t>
+            </a:r>
+          </a:p>
+        </p:txBody>
+      </p:sp>
+      <p:pic>
+        <p:nvPicPr>
+          <p:cNvPr id="3" name="Picture 2" descr="ch01_deriv_carnot_2.png"/>
+          <p:cNvPicPr>
+            <a:picLocks noChangeAspect="1"/>
+          </p:cNvPicPr>
+          <p:nvPr/>
+        </p:nvPicPr>
+        <p:blipFill>
+          <a:blip r:embed="rId2"/>
+          <a:stretch>
+            <a:fillRect/>
+          </a:stretch>
+        </p:blipFill>
+        <p:spPr>
+          <a:xfrm>
+            <a:off x="724039" y="713232"/>
+            <a:ext cx="10743616" cy="5322316"/>
+          </a:xfrm>
+          <a:prstGeom prst="rect">
+            <a:avLst/>
+          </a:prstGeom>
+        </p:spPr>
+      </p:pic>
+      <p:sp>
+        <p:nvSpPr>
+          <p:cNvPr id="4" name="edge:caption"/>
           <p:cNvSpPr txBox="1"/>
           <p:nvPr/>
         </p:nvSpPr>
         <p:spPr>
           <a:xfrm>
-            <a:off x="822960" y="2676875"/>
-            <a:ext cx="10801807" cy="385762"/>
+            <a:off x="228600" y="6090412"/>
+            <a:ext cx="11734495" cy="520700"/>
           </a:xfrm>
           <a:prstGeom prst="rect">
             <a:avLst/>
@@ -7175,314 +7160,24 @@
           </a:bodyPr>
           <a:lstStyle/>
           <a:p>
-            <a:pPr>
-              <a:lnSpc>
-                <a:spcPct val="130000"/>
-              </a:lnSpc>
-            </a:pPr>
-            <a:r>
-              <a:rPr sz="1500">
-                <a:solidFill>
-                  <a:srgbClr val="33221E"/>
-                </a:solidFill>
-                <a:latin typeface="Avenir Next"/>
-                <a:ea typeface="Hiragino Sans"/>
-                <a:cs typeface="Hiragino Sans"/>
-              </a:rPr>
-              <a:t>高温 T_H で熱 Q_H を受け、低温 T_L で熱 Q_L を捨てる。1 周でエントロピーが元に戻るには </a:t>
-            </a:r>
-            <a:r>
-              <a:rPr sz="1500" b="1">
-                <a:solidFill>
-                  <a:srgbClr val="33221E"/>
-                </a:solidFill>
-                <a:latin typeface="Avenir Next"/>
-                <a:ea typeface="Hiragino Sans"/>
-                <a:cs typeface="Hiragino Sans"/>
-              </a:rPr>
-              <a:t>Q_H / T_H = Q_L / T_L</a:t>
-            </a:r>
-            <a:r>
-              <a:rPr sz="1500">
-                <a:solidFill>
-                  <a:srgbClr val="33221E"/>
-                </a:solidFill>
-                <a:latin typeface="Avenir Next"/>
-                <a:ea typeface="Hiragino Sans"/>
-                <a:cs typeface="Hiragino Sans"/>
-              </a:rPr>
-              <a:t>。</a:t>
-            </a:r>
-          </a:p>
-        </p:txBody>
-      </p:sp>
-      <p:sp>
-        <p:nvSpPr>
-          <p:cNvPr id="5" name="Rectangle 4"/>
-          <p:cNvSpPr/>
-          <p:nvPr/>
-        </p:nvSpPr>
-        <p:spPr>
-          <a:xfrm>
-            <a:off x="566928" y="3214529"/>
-            <a:ext cx="11057839" cy="9525"/>
-          </a:xfrm>
-          <a:prstGeom prst="rect">
-            <a:avLst/>
-          </a:prstGeom>
-          <a:solidFill>
-            <a:srgbClr val="E5DCCE"/>
-          </a:solidFill>
-          <a:ln>
-            <a:noFill/>
-          </a:ln>
-          <a:effectLst/>
-        </p:spPr>
-        <p:style>
-          <a:lnRef idx="1">
-            <a:schemeClr val="accent1"/>
-          </a:lnRef>
-          <a:fillRef idx="3">
-            <a:schemeClr val="accent1"/>
-          </a:fillRef>
-          <a:effectRef idx="2">
-            <a:schemeClr val="accent1"/>
-          </a:effectRef>
-          <a:fontRef idx="minor">
-            <a:schemeClr val="lt1"/>
-          </a:fontRef>
-        </p:style>
-        <p:txBody>
-          <a:bodyPr rtlCol="0" anchor="ctr"/>
-          <a:lstStyle/>
-          <a:p>
             <a:pPr algn="ctr"/>
-          </a:p>
-        </p:txBody>
-      </p:sp>
-      <p:sp>
-        <p:nvSpPr>
-          <p:cNvPr id="6" name="TextBox 5"/>
-          <p:cNvSpPr txBox="1"/>
-          <p:nvPr/>
-        </p:nvSpPr>
-        <p:spPr>
-          <a:xfrm>
-            <a:off x="566928" y="3391821"/>
-            <a:ext cx="11057839" cy="254000"/>
-          </a:xfrm>
-          <a:prstGeom prst="rect">
-            <a:avLst/>
-          </a:prstGeom>
-          <a:noFill/>
-        </p:spPr>
-        <p:txBody>
-          <a:bodyPr wrap="none" lIns="0" rIns="0" tIns="0" bIns="0">
-            <a:noAutofit/>
-          </a:bodyPr>
-          <a:lstStyle/>
-          <a:p>
-            <a:r>
-              <a:rPr sz="1600" b="1">
-                <a:solidFill>
-                  <a:srgbClr val="5C7268"/>
-                </a:solidFill>
-                <a:latin typeface="Avenir Next"/>
-                <a:ea typeface="Hiragino Sans"/>
-                <a:cs typeface="Hiragino Sans"/>
-              </a:rPr>
-              <a:t>② エネルギー保存｜仕事は受けた熱と捨てた熱の差</a:t>
-            </a:r>
-          </a:p>
-        </p:txBody>
-      </p:sp>
-      <p:sp>
-        <p:nvSpPr>
-          <p:cNvPr id="7" name="TextBox 6"/>
-          <p:cNvSpPr txBox="1"/>
-          <p:nvPr/>
-        </p:nvSpPr>
-        <p:spPr>
-          <a:xfrm>
-            <a:off x="822960" y="3683921"/>
-            <a:ext cx="10801807" cy="385762"/>
-          </a:xfrm>
-          <a:prstGeom prst="rect">
-            <a:avLst/>
-          </a:prstGeom>
-          <a:noFill/>
-        </p:spPr>
-        <p:txBody>
-          <a:bodyPr wrap="square" lIns="0" rIns="0" tIns="0" bIns="0">
-            <a:noAutofit/>
-          </a:bodyPr>
-          <a:lstStyle/>
-          <a:p>
-            <a:pPr>
-              <a:lnSpc>
-                <a:spcPct val="130000"/>
-              </a:lnSpc>
-            </a:pPr>
-            <a:r>
-              <a:rPr sz="1500">
-                <a:solidFill>
-                  <a:srgbClr val="33221E"/>
-                </a:solidFill>
-                <a:latin typeface="Avenir Next"/>
-                <a:ea typeface="Hiragino Sans"/>
-                <a:cs typeface="Hiragino Sans"/>
-              </a:rPr>
-              <a:t>W = Q_H − Q_L。捨てる熱 Q_L をゼロにはできない（①で Q_L = Q_H T_L / T_H は正）。</a:t>
-            </a:r>
-          </a:p>
-        </p:txBody>
-      </p:sp>
-      <p:sp>
-        <p:nvSpPr>
-          <p:cNvPr id="8" name="Rectangle 7"/>
-          <p:cNvSpPr/>
-          <p:nvPr/>
-        </p:nvSpPr>
-        <p:spPr>
-          <a:xfrm>
-            <a:off x="566928" y="4221575"/>
-            <a:ext cx="11057839" cy="9525"/>
-          </a:xfrm>
-          <a:prstGeom prst="rect">
-            <a:avLst/>
-          </a:prstGeom>
-          <a:solidFill>
-            <a:srgbClr val="E5DCCE"/>
-          </a:solidFill>
-          <a:ln>
-            <a:noFill/>
-          </a:ln>
-          <a:effectLst/>
-        </p:spPr>
-        <p:style>
-          <a:lnRef idx="1">
-            <a:schemeClr val="accent1"/>
-          </a:lnRef>
-          <a:fillRef idx="3">
-            <a:schemeClr val="accent1"/>
-          </a:fillRef>
-          <a:effectRef idx="2">
-            <a:schemeClr val="accent1"/>
-          </a:effectRef>
-          <a:fontRef idx="minor">
-            <a:schemeClr val="lt1"/>
-          </a:fontRef>
-        </p:style>
-        <p:txBody>
-          <a:bodyPr rtlCol="0" anchor="ctr"/>
-          <a:lstStyle/>
-          <a:p>
-            <a:pPr algn="ctr"/>
-          </a:p>
-        </p:txBody>
-      </p:sp>
-      <p:sp>
-        <p:nvSpPr>
-          <p:cNvPr id="9" name="build:ghost"/>
-          <p:cNvSpPr txBox="1"/>
-          <p:nvPr/>
-        </p:nvSpPr>
-        <p:spPr>
-          <a:xfrm>
-            <a:off x="566928" y="4398867"/>
-            <a:ext cx="11057839" cy="254000"/>
-          </a:xfrm>
-          <a:prstGeom prst="rect">
-            <a:avLst/>
-          </a:prstGeom>
-          <a:noFill/>
-        </p:spPr>
-        <p:txBody>
-          <a:bodyPr wrap="none" lIns="0" rIns="0" tIns="0" bIns="0">
-            <a:noAutofit/>
-          </a:bodyPr>
-          <a:lstStyle/>
-          <a:p>
-            <a:r>
-              <a:rPr sz="1600" b="1">
-                <a:solidFill>
-                  <a:srgbClr val="C1C9C5"/>
-                </a:solidFill>
-                <a:latin typeface="Avenir Next"/>
-                <a:ea typeface="Hiragino Sans"/>
-                <a:cs typeface="Hiragino Sans"/>
-              </a:rPr>
-              <a:t>③ 効率｜η = W / Q_H = 1 − Q_L / Q_H = 1 − T_L / T_H</a:t>
-            </a:r>
-          </a:p>
-        </p:txBody>
-      </p:sp>
-      <p:sp>
-        <p:nvSpPr>
-          <p:cNvPr id="10" name="build:ghost"/>
-          <p:cNvSpPr txBox="1"/>
-          <p:nvPr/>
-        </p:nvSpPr>
-        <p:spPr>
-          <a:xfrm>
-            <a:off x="822960" y="4690967"/>
-            <a:ext cx="10801807" cy="385762"/>
-          </a:xfrm>
-          <a:prstGeom prst="rect">
-            <a:avLst/>
-          </a:prstGeom>
-          <a:noFill/>
-        </p:spPr>
-        <p:txBody>
-          <a:bodyPr wrap="square" lIns="0" rIns="0" tIns="0" bIns="0">
-            <a:noAutofit/>
-          </a:bodyPr>
-          <a:lstStyle/>
-          <a:p>
-            <a:pPr>
-              <a:lnSpc>
-                <a:spcPct val="130000"/>
-              </a:lnSpc>
-            </a:pPr>
-            <a:r>
-              <a:rPr sz="1500">
-                <a:solidFill>
-                  <a:srgbClr val="C1BCBB"/>
-                </a:solidFill>
-                <a:latin typeface="Avenir Next"/>
-                <a:ea typeface="Hiragino Sans"/>
-                <a:cs typeface="Hiragino Sans"/>
-              </a:rPr>
-              <a:t>温度の「比」だけで決まる。</a:t>
-            </a:r>
-            <a:r>
-              <a:rPr sz="1500" b="1">
-                <a:solidFill>
-                  <a:srgbClr val="C1BCBB"/>
-                </a:solidFill>
-                <a:latin typeface="Avenir Next"/>
-                <a:ea typeface="Hiragino Sans"/>
-                <a:cs typeface="Hiragino Sans"/>
-              </a:rPr>
-              <a:t>上げるには T_H を上げるか T_L を下げるか</a:t>
-            </a:r>
-            <a:r>
-              <a:rPr sz="1500">
-                <a:solidFill>
-                  <a:srgbClr val="C1BCBB"/>
-                </a:solidFill>
-                <a:latin typeface="Avenir Next"/>
-                <a:ea typeface="Hiragino Sans"/>
-                <a:cs typeface="Hiragino Sans"/>
-              </a:rPr>
-              <a:t>しかなく、T_L は環境温度で下げられない。</a:t>
-            </a:r>
-          </a:p>
-        </p:txBody>
-      </p:sp>
-      <p:sp>
-        <p:nvSpPr>
-          <p:cNvPr id="11" name="TextBox 10"/>
+            <a:r>
+              <a:rPr sz="1400">
+                <a:solidFill>
+                  <a:srgbClr val="71635B"/>
+                </a:solidFill>
+                <a:latin typeface="Avenir Next"/>
+                <a:ea typeface="Hiragino Sans"/>
+                <a:cs typeface="Hiragino Sans"/>
+              </a:rPr>
+              <a:t>取り出せる仕事は、受けた熱から捨てた熱を引いた残り。①より Q_L は正の値なので、捨てる熱をゼロにすることはできない。　出典｜コード/fig_ch01.py</a:t>
+            </a:r>
+          </a:p>
+        </p:txBody>
+      </p:sp>
+      <p:sp>
+        <p:nvSpPr>
+          <p:cNvPr id="5" name="TextBox 4"/>
           <p:cNvSpPr txBox="1"/>
           <p:nvPr/>
         </p:nvSpPr>
@@ -7538,59 +7233,14 @@
       <p:grpSpPr/>
       <p:sp>
         <p:nvSpPr>
-          <p:cNvPr id="2" name="TextBox 1"/>
+          <p:cNvPr id="2" name="edge:title"/>
           <p:cNvSpPr txBox="1"/>
           <p:nvPr/>
         </p:nvSpPr>
         <p:spPr>
           <a:xfrm>
-            <a:off x="566928" y="457200"/>
-            <a:ext cx="11057839" cy="658368"/>
-          </a:xfrm>
-          <a:prstGeom prst="rect">
-            <a:avLst/>
-          </a:prstGeom>
-          <a:noFill/>
-        </p:spPr>
-        <p:txBody>
-          <a:bodyPr wrap="square" lIns="0" rIns="0" tIns="0" bIns="0" anchor="ctr">
-            <a:noAutofit/>
-          </a:bodyPr>
-          <a:lstStyle/>
-          <a:p>
-            <a:pPr>
-              <a:lnSpc>
-                <a:spcPct val="106000"/>
-              </a:lnSpc>
-              <a:defRPr sz="3390" b="1">
-                <a:solidFill>
-                  <a:srgbClr val="7C332A"/>
-                </a:solidFill>
-                <a:latin typeface="Avenir Next"/>
-                <a:ea typeface="Hiragino Sans"/>
-                <a:cs typeface="Hiragino Sans"/>
-              </a:defRPr>
-            </a:pPr>
-            <a:r>
-              <a:rPr>
-                <a:ea typeface="Hiragino Sans"/>
-                <a:cs typeface="Hiragino Sans"/>
-              </a:rPr>
-              <a:t>導出 — なぜ熱機関の効率に上限があるのか</a:t>
-            </a:r>
-          </a:p>
-        </p:txBody>
-      </p:sp>
-      <p:sp>
-        <p:nvSpPr>
-          <p:cNvPr id="3" name="TextBox 2"/>
-          <p:cNvSpPr txBox="1"/>
-          <p:nvPr/>
-        </p:nvSpPr>
-        <p:spPr>
-          <a:xfrm>
-            <a:off x="566928" y="2384775"/>
-            <a:ext cx="11057839" cy="254000"/>
+            <a:off x="566928" y="146304"/>
+            <a:ext cx="11057839" cy="457200"/>
           </a:xfrm>
           <a:prstGeom prst="rect">
             <a:avLst/>
@@ -7603,30 +7253,60 @@
           </a:bodyPr>
           <a:lstStyle/>
           <a:p>
-            <a:r>
-              <a:rPr sz="1600" b="1">
-                <a:solidFill>
-                  <a:srgbClr val="5C7268"/>
-                </a:solidFill>
-                <a:latin typeface="Avenir Next"/>
-                <a:ea typeface="Hiragino Sans"/>
-                <a:cs typeface="Hiragino Sans"/>
-              </a:rPr>
-              <a:t>① エントロピー収支｜可逆サイクルは 1 周で元に戻る</a:t>
-            </a:r>
-          </a:p>
-        </p:txBody>
-      </p:sp>
-      <p:sp>
-        <p:nvSpPr>
-          <p:cNvPr id="4" name="TextBox 3"/>
+            <a:pPr>
+              <a:defRPr sz="2400" b="1">
+                <a:solidFill>
+                  <a:srgbClr val="7C332A"/>
+                </a:solidFill>
+                <a:latin typeface="Avenir Next"/>
+                <a:ea typeface="Hiragino Sans"/>
+                <a:cs typeface="Hiragino Sans"/>
+              </a:defRPr>
+            </a:pPr>
+            <a:r>
+              <a:rPr>
+                <a:ea typeface="Hiragino Sans"/>
+                <a:cs typeface="Hiragino Sans"/>
+              </a:rPr>
+              <a:t>導出 — なぜ熱機関の効率に上限があるのか</a:t>
+            </a:r>
+          </a:p>
+        </p:txBody>
+      </p:sp>
+      <p:pic>
+        <p:nvPicPr>
+          <p:cNvPr id="3" name="Picture 2" descr="ch01_deriv_carnot_3.png"/>
+          <p:cNvPicPr>
+            <a:picLocks noChangeAspect="1"/>
+          </p:cNvPicPr>
+          <p:nvPr/>
+        </p:nvPicPr>
+        <p:blipFill>
+          <a:blip r:embed="rId2"/>
+          <a:stretch>
+            <a:fillRect/>
+          </a:stretch>
+        </p:blipFill>
+        <p:spPr>
+          <a:xfrm>
+            <a:off x="724039" y="713232"/>
+            <a:ext cx="10743616" cy="5322316"/>
+          </a:xfrm>
+          <a:prstGeom prst="rect">
+            <a:avLst/>
+          </a:prstGeom>
+        </p:spPr>
+      </p:pic>
+      <p:sp>
+        <p:nvSpPr>
+          <p:cNvPr id="4" name="edge:caption"/>
           <p:cNvSpPr txBox="1"/>
           <p:nvPr/>
         </p:nvSpPr>
         <p:spPr>
           <a:xfrm>
-            <a:off x="822960" y="2676875"/>
-            <a:ext cx="10801807" cy="385762"/>
+            <a:off x="228600" y="6090412"/>
+            <a:ext cx="11734495" cy="520700"/>
           </a:xfrm>
           <a:prstGeom prst="rect">
             <a:avLst/>
@@ -7639,314 +7319,24 @@
           </a:bodyPr>
           <a:lstStyle/>
           <a:p>
-            <a:pPr>
-              <a:lnSpc>
-                <a:spcPct val="130000"/>
-              </a:lnSpc>
-            </a:pPr>
-            <a:r>
-              <a:rPr sz="1500">
-                <a:solidFill>
-                  <a:srgbClr val="33221E"/>
-                </a:solidFill>
-                <a:latin typeface="Avenir Next"/>
-                <a:ea typeface="Hiragino Sans"/>
-                <a:cs typeface="Hiragino Sans"/>
-              </a:rPr>
-              <a:t>高温 T_H で熱 Q_H を受け、低温 T_L で熱 Q_L を捨てる。1 周でエントロピーが元に戻るには </a:t>
-            </a:r>
-            <a:r>
-              <a:rPr sz="1500" b="1">
-                <a:solidFill>
-                  <a:srgbClr val="33221E"/>
-                </a:solidFill>
-                <a:latin typeface="Avenir Next"/>
-                <a:ea typeface="Hiragino Sans"/>
-                <a:cs typeface="Hiragino Sans"/>
-              </a:rPr>
-              <a:t>Q_H / T_H = Q_L / T_L</a:t>
-            </a:r>
-            <a:r>
-              <a:rPr sz="1500">
-                <a:solidFill>
-                  <a:srgbClr val="33221E"/>
-                </a:solidFill>
-                <a:latin typeface="Avenir Next"/>
-                <a:ea typeface="Hiragino Sans"/>
-                <a:cs typeface="Hiragino Sans"/>
-              </a:rPr>
-              <a:t>。</a:t>
-            </a:r>
-          </a:p>
-        </p:txBody>
-      </p:sp>
-      <p:sp>
-        <p:nvSpPr>
-          <p:cNvPr id="5" name="Rectangle 4"/>
-          <p:cNvSpPr/>
-          <p:nvPr/>
-        </p:nvSpPr>
-        <p:spPr>
-          <a:xfrm>
-            <a:off x="566928" y="3214529"/>
-            <a:ext cx="11057839" cy="9525"/>
-          </a:xfrm>
-          <a:prstGeom prst="rect">
-            <a:avLst/>
-          </a:prstGeom>
-          <a:solidFill>
-            <a:srgbClr val="E5DCCE"/>
-          </a:solidFill>
-          <a:ln>
-            <a:noFill/>
-          </a:ln>
-          <a:effectLst/>
-        </p:spPr>
-        <p:style>
-          <a:lnRef idx="1">
-            <a:schemeClr val="accent1"/>
-          </a:lnRef>
-          <a:fillRef idx="3">
-            <a:schemeClr val="accent1"/>
-          </a:fillRef>
-          <a:effectRef idx="2">
-            <a:schemeClr val="accent1"/>
-          </a:effectRef>
-          <a:fontRef idx="minor">
-            <a:schemeClr val="lt1"/>
-          </a:fontRef>
-        </p:style>
-        <p:txBody>
-          <a:bodyPr rtlCol="0" anchor="ctr"/>
-          <a:lstStyle/>
-          <a:p>
             <a:pPr algn="ctr"/>
-          </a:p>
-        </p:txBody>
-      </p:sp>
-      <p:sp>
-        <p:nvSpPr>
-          <p:cNvPr id="6" name="TextBox 5"/>
-          <p:cNvSpPr txBox="1"/>
-          <p:nvPr/>
-        </p:nvSpPr>
-        <p:spPr>
-          <a:xfrm>
-            <a:off x="566928" y="3391821"/>
-            <a:ext cx="11057839" cy="254000"/>
-          </a:xfrm>
-          <a:prstGeom prst="rect">
-            <a:avLst/>
-          </a:prstGeom>
-          <a:noFill/>
-        </p:spPr>
-        <p:txBody>
-          <a:bodyPr wrap="none" lIns="0" rIns="0" tIns="0" bIns="0">
-            <a:noAutofit/>
-          </a:bodyPr>
-          <a:lstStyle/>
-          <a:p>
-            <a:r>
-              <a:rPr sz="1600" b="1">
-                <a:solidFill>
-                  <a:srgbClr val="5C7268"/>
-                </a:solidFill>
-                <a:latin typeface="Avenir Next"/>
-                <a:ea typeface="Hiragino Sans"/>
-                <a:cs typeface="Hiragino Sans"/>
-              </a:rPr>
-              <a:t>② エネルギー保存｜仕事は受けた熱と捨てた熱の差</a:t>
-            </a:r>
-          </a:p>
-        </p:txBody>
-      </p:sp>
-      <p:sp>
-        <p:nvSpPr>
-          <p:cNvPr id="7" name="TextBox 6"/>
-          <p:cNvSpPr txBox="1"/>
-          <p:nvPr/>
-        </p:nvSpPr>
-        <p:spPr>
-          <a:xfrm>
-            <a:off x="822960" y="3683921"/>
-            <a:ext cx="10801807" cy="385762"/>
-          </a:xfrm>
-          <a:prstGeom prst="rect">
-            <a:avLst/>
-          </a:prstGeom>
-          <a:noFill/>
-        </p:spPr>
-        <p:txBody>
-          <a:bodyPr wrap="square" lIns="0" rIns="0" tIns="0" bIns="0">
-            <a:noAutofit/>
-          </a:bodyPr>
-          <a:lstStyle/>
-          <a:p>
-            <a:pPr>
-              <a:lnSpc>
-                <a:spcPct val="130000"/>
-              </a:lnSpc>
-            </a:pPr>
-            <a:r>
-              <a:rPr sz="1500">
-                <a:solidFill>
-                  <a:srgbClr val="33221E"/>
-                </a:solidFill>
-                <a:latin typeface="Avenir Next"/>
-                <a:ea typeface="Hiragino Sans"/>
-                <a:cs typeface="Hiragino Sans"/>
-              </a:rPr>
-              <a:t>W = Q_H − Q_L。捨てる熱 Q_L をゼロにはできない（①で Q_L = Q_H T_L / T_H は正）。</a:t>
-            </a:r>
-          </a:p>
-        </p:txBody>
-      </p:sp>
-      <p:sp>
-        <p:nvSpPr>
-          <p:cNvPr id="8" name="Rectangle 7"/>
-          <p:cNvSpPr/>
-          <p:nvPr/>
-        </p:nvSpPr>
-        <p:spPr>
-          <a:xfrm>
-            <a:off x="566928" y="4221575"/>
-            <a:ext cx="11057839" cy="9525"/>
-          </a:xfrm>
-          <a:prstGeom prst="rect">
-            <a:avLst/>
-          </a:prstGeom>
-          <a:solidFill>
-            <a:srgbClr val="E5DCCE"/>
-          </a:solidFill>
-          <a:ln>
-            <a:noFill/>
-          </a:ln>
-          <a:effectLst/>
-        </p:spPr>
-        <p:style>
-          <a:lnRef idx="1">
-            <a:schemeClr val="accent1"/>
-          </a:lnRef>
-          <a:fillRef idx="3">
-            <a:schemeClr val="accent1"/>
-          </a:fillRef>
-          <a:effectRef idx="2">
-            <a:schemeClr val="accent1"/>
-          </a:effectRef>
-          <a:fontRef idx="minor">
-            <a:schemeClr val="lt1"/>
-          </a:fontRef>
-        </p:style>
-        <p:txBody>
-          <a:bodyPr rtlCol="0" anchor="ctr"/>
-          <a:lstStyle/>
-          <a:p>
-            <a:pPr algn="ctr"/>
-          </a:p>
-        </p:txBody>
-      </p:sp>
-      <p:sp>
-        <p:nvSpPr>
-          <p:cNvPr id="9" name="TextBox 8"/>
-          <p:cNvSpPr txBox="1"/>
-          <p:nvPr/>
-        </p:nvSpPr>
-        <p:spPr>
-          <a:xfrm>
-            <a:off x="566928" y="4398867"/>
-            <a:ext cx="11057839" cy="254000"/>
-          </a:xfrm>
-          <a:prstGeom prst="rect">
-            <a:avLst/>
-          </a:prstGeom>
-          <a:noFill/>
-        </p:spPr>
-        <p:txBody>
-          <a:bodyPr wrap="none" lIns="0" rIns="0" tIns="0" bIns="0">
-            <a:noAutofit/>
-          </a:bodyPr>
-          <a:lstStyle/>
-          <a:p>
-            <a:r>
-              <a:rPr sz="1600" b="1">
-                <a:solidFill>
-                  <a:srgbClr val="5C7268"/>
-                </a:solidFill>
-                <a:latin typeface="Avenir Next"/>
-                <a:ea typeface="Hiragino Sans"/>
-                <a:cs typeface="Hiragino Sans"/>
-              </a:rPr>
-              <a:t>③ 効率｜η = W / Q_H = 1 − Q_L / Q_H = 1 − T_L / T_H</a:t>
-            </a:r>
-          </a:p>
-        </p:txBody>
-      </p:sp>
-      <p:sp>
-        <p:nvSpPr>
-          <p:cNvPr id="10" name="TextBox 9"/>
-          <p:cNvSpPr txBox="1"/>
-          <p:nvPr/>
-        </p:nvSpPr>
-        <p:spPr>
-          <a:xfrm>
-            <a:off x="822960" y="4690967"/>
-            <a:ext cx="10801807" cy="385762"/>
-          </a:xfrm>
-          <a:prstGeom prst="rect">
-            <a:avLst/>
-          </a:prstGeom>
-          <a:noFill/>
-        </p:spPr>
-        <p:txBody>
-          <a:bodyPr wrap="square" lIns="0" rIns="0" tIns="0" bIns="0">
-            <a:noAutofit/>
-          </a:bodyPr>
-          <a:lstStyle/>
-          <a:p>
-            <a:pPr>
-              <a:lnSpc>
-                <a:spcPct val="130000"/>
-              </a:lnSpc>
-            </a:pPr>
-            <a:r>
-              <a:rPr sz="1500">
-                <a:solidFill>
-                  <a:srgbClr val="33221E"/>
-                </a:solidFill>
-                <a:latin typeface="Avenir Next"/>
-                <a:ea typeface="Hiragino Sans"/>
-                <a:cs typeface="Hiragino Sans"/>
-              </a:rPr>
-              <a:t>温度の「比」だけで決まる。</a:t>
-            </a:r>
-            <a:r>
-              <a:rPr sz="1500" b="1">
-                <a:solidFill>
-                  <a:srgbClr val="33221E"/>
-                </a:solidFill>
-                <a:latin typeface="Avenir Next"/>
-                <a:ea typeface="Hiragino Sans"/>
-                <a:cs typeface="Hiragino Sans"/>
-              </a:rPr>
-              <a:t>上げるには T_H を上げるか T_L を下げるか</a:t>
-            </a:r>
-            <a:r>
-              <a:rPr sz="1500">
-                <a:solidFill>
-                  <a:srgbClr val="33221E"/>
-                </a:solidFill>
-                <a:latin typeface="Avenir Next"/>
-                <a:ea typeface="Hiragino Sans"/>
-                <a:cs typeface="Hiragino Sans"/>
-              </a:rPr>
-              <a:t>しかなく、T_L は環境温度で下げられない。</a:t>
-            </a:r>
-          </a:p>
-        </p:txBody>
-      </p:sp>
-      <p:sp>
-        <p:nvSpPr>
-          <p:cNvPr id="11" name="TextBox 10"/>
+            <a:r>
+              <a:rPr sz="1400">
+                <a:solidFill>
+                  <a:srgbClr val="71635B"/>
+                </a:solidFill>
+                <a:latin typeface="Avenir Next"/>
+                <a:ea typeface="Hiragino Sans"/>
+                <a:cs typeface="Hiragino Sans"/>
+              </a:rPr>
+              <a:t>効率の定義に代入し、①で Q_L を消すと熱量が全部消えて温度だけが残る。上げるには T_H を上げるか T_L を下げるかしかなく、T_L は環境温度なので下げられない。　出典｜コード/fig_ch01.py</a:t>
+            </a:r>
+          </a:p>
+        </p:txBody>
+      </p:sp>
+      <p:sp>
+        <p:nvSpPr>
+          <p:cNvPr id="5" name="TextBox 4"/>
           <p:cNvSpPr txBox="1"/>
           <p:nvPr/>
         </p:nvSpPr>
@@ -21737,59 +21127,14 @@
       <p:grpSpPr/>
       <p:sp>
         <p:nvSpPr>
-          <p:cNvPr id="2" name="TextBox 1"/>
+          <p:cNvPr id="2" name="edge:title"/>
           <p:cNvSpPr txBox="1"/>
           <p:nvPr/>
         </p:nvSpPr>
         <p:spPr>
           <a:xfrm>
-            <a:off x="566928" y="457200"/>
-            <a:ext cx="11057839" cy="658368"/>
-          </a:xfrm>
-          <a:prstGeom prst="rect">
-            <a:avLst/>
-          </a:prstGeom>
-          <a:noFill/>
-        </p:spPr>
-        <p:txBody>
-          <a:bodyPr wrap="square" lIns="0" rIns="0" tIns="0" bIns="0" anchor="ctr">
-            <a:noAutofit/>
-          </a:bodyPr>
-          <a:lstStyle/>
-          <a:p>
-            <a:pPr>
-              <a:lnSpc>
-                <a:spcPct val="106000"/>
-              </a:lnSpc>
-              <a:defRPr sz="3390" b="1">
-                <a:solidFill>
-                  <a:srgbClr val="7C332A"/>
-                </a:solidFill>
-                <a:latin typeface="Avenir Next"/>
-                <a:ea typeface="Hiragino Sans"/>
-                <a:cs typeface="Hiragino Sans"/>
-              </a:defRPr>
-            </a:pPr>
-            <a:r>
-              <a:rPr>
-                <a:ea typeface="Hiragino Sans"/>
-                <a:cs typeface="Hiragino Sans"/>
-              </a:rPr>
-              <a:t>導出 — なぜ熱機関の効率に上限があるのか</a:t>
-            </a:r>
-          </a:p>
-        </p:txBody>
-      </p:sp>
-      <p:sp>
-        <p:nvSpPr>
-          <p:cNvPr id="3" name="TextBox 2"/>
-          <p:cNvSpPr txBox="1"/>
-          <p:nvPr/>
-        </p:nvSpPr>
-        <p:spPr>
-          <a:xfrm>
-            <a:off x="566928" y="2384775"/>
-            <a:ext cx="11057839" cy="254000"/>
+            <a:off x="566928" y="146304"/>
+            <a:ext cx="11057839" cy="457200"/>
           </a:xfrm>
           <a:prstGeom prst="rect">
             <a:avLst/>
@@ -21802,30 +21147,60 @@
           </a:bodyPr>
           <a:lstStyle/>
           <a:p>
-            <a:r>
-              <a:rPr sz="1600" b="1">
-                <a:solidFill>
-                  <a:srgbClr val="5C7268"/>
-                </a:solidFill>
-                <a:latin typeface="Avenir Next"/>
-                <a:ea typeface="Hiragino Sans"/>
-                <a:cs typeface="Hiragino Sans"/>
-              </a:rPr>
-              <a:t>① エントロピー収支｜可逆サイクルは 1 周で元に戻る</a:t>
-            </a:r>
-          </a:p>
-        </p:txBody>
-      </p:sp>
-      <p:sp>
-        <p:nvSpPr>
-          <p:cNvPr id="4" name="TextBox 3"/>
+            <a:pPr>
+              <a:defRPr sz="2400" b="1">
+                <a:solidFill>
+                  <a:srgbClr val="7C332A"/>
+                </a:solidFill>
+                <a:latin typeface="Avenir Next"/>
+                <a:ea typeface="Hiragino Sans"/>
+                <a:cs typeface="Hiragino Sans"/>
+              </a:defRPr>
+            </a:pPr>
+            <a:r>
+              <a:rPr>
+                <a:ea typeface="Hiragino Sans"/>
+                <a:cs typeface="Hiragino Sans"/>
+              </a:rPr>
+              <a:t>導出 — なぜ熱機関の効率に上限があるのか</a:t>
+            </a:r>
+          </a:p>
+        </p:txBody>
+      </p:sp>
+      <p:pic>
+        <p:nvPicPr>
+          <p:cNvPr id="3" name="Picture 2" descr="ch01_deriv_carnot_1.png"/>
+          <p:cNvPicPr>
+            <a:picLocks noChangeAspect="1"/>
+          </p:cNvPicPr>
+          <p:nvPr/>
+        </p:nvPicPr>
+        <p:blipFill>
+          <a:blip r:embed="rId2"/>
+          <a:stretch>
+            <a:fillRect/>
+          </a:stretch>
+        </p:blipFill>
+        <p:spPr>
+          <a:xfrm>
+            <a:off x="724039" y="713232"/>
+            <a:ext cx="10743616" cy="5322316"/>
+          </a:xfrm>
+          <a:prstGeom prst="rect">
+            <a:avLst/>
+          </a:prstGeom>
+        </p:spPr>
+      </p:pic>
+      <p:sp>
+        <p:nvSpPr>
+          <p:cNvPr id="4" name="edge:caption"/>
           <p:cNvSpPr txBox="1"/>
           <p:nvPr/>
         </p:nvSpPr>
         <p:spPr>
           <a:xfrm>
-            <a:off x="822960" y="2676875"/>
-            <a:ext cx="10801807" cy="385762"/>
+            <a:off x="228600" y="6090412"/>
+            <a:ext cx="11734495" cy="520700"/>
           </a:xfrm>
           <a:prstGeom prst="rect">
             <a:avLst/>
@@ -21838,314 +21213,24 @@
           </a:bodyPr>
           <a:lstStyle/>
           <a:p>
-            <a:pPr>
-              <a:lnSpc>
-                <a:spcPct val="130000"/>
-              </a:lnSpc>
-            </a:pPr>
-            <a:r>
-              <a:rPr sz="1500">
-                <a:solidFill>
-                  <a:srgbClr val="33221E"/>
-                </a:solidFill>
-                <a:latin typeface="Avenir Next"/>
-                <a:ea typeface="Hiragino Sans"/>
-                <a:cs typeface="Hiragino Sans"/>
-              </a:rPr>
-              <a:t>高温 T_H で熱 Q_H を受け、低温 T_L で熱 Q_L を捨てる。1 周でエントロピーが元に戻るには </a:t>
-            </a:r>
-            <a:r>
-              <a:rPr sz="1500" b="1">
-                <a:solidFill>
-                  <a:srgbClr val="33221E"/>
-                </a:solidFill>
-                <a:latin typeface="Avenir Next"/>
-                <a:ea typeface="Hiragino Sans"/>
-                <a:cs typeface="Hiragino Sans"/>
-              </a:rPr>
-              <a:t>Q_H / T_H = Q_L / T_L</a:t>
-            </a:r>
-            <a:r>
-              <a:rPr sz="1500">
-                <a:solidFill>
-                  <a:srgbClr val="33221E"/>
-                </a:solidFill>
-                <a:latin typeface="Avenir Next"/>
-                <a:ea typeface="Hiragino Sans"/>
-                <a:cs typeface="Hiragino Sans"/>
-              </a:rPr>
-              <a:t>。</a:t>
-            </a:r>
-          </a:p>
-        </p:txBody>
-      </p:sp>
-      <p:sp>
-        <p:nvSpPr>
-          <p:cNvPr id="5" name="Rectangle 4"/>
-          <p:cNvSpPr/>
-          <p:nvPr/>
-        </p:nvSpPr>
-        <p:spPr>
-          <a:xfrm>
-            <a:off x="566928" y="3214529"/>
-            <a:ext cx="11057839" cy="9525"/>
-          </a:xfrm>
-          <a:prstGeom prst="rect">
-            <a:avLst/>
-          </a:prstGeom>
-          <a:solidFill>
-            <a:srgbClr val="E5DCCE"/>
-          </a:solidFill>
-          <a:ln>
-            <a:noFill/>
-          </a:ln>
-          <a:effectLst/>
-        </p:spPr>
-        <p:style>
-          <a:lnRef idx="1">
-            <a:schemeClr val="accent1"/>
-          </a:lnRef>
-          <a:fillRef idx="3">
-            <a:schemeClr val="accent1"/>
-          </a:fillRef>
-          <a:effectRef idx="2">
-            <a:schemeClr val="accent1"/>
-          </a:effectRef>
-          <a:fontRef idx="minor">
-            <a:schemeClr val="lt1"/>
-          </a:fontRef>
-        </p:style>
-        <p:txBody>
-          <a:bodyPr rtlCol="0" anchor="ctr"/>
-          <a:lstStyle/>
-          <a:p>
             <a:pPr algn="ctr"/>
-          </a:p>
-        </p:txBody>
-      </p:sp>
-      <p:sp>
-        <p:nvSpPr>
-          <p:cNvPr id="6" name="build:ghost"/>
-          <p:cNvSpPr txBox="1"/>
-          <p:nvPr/>
-        </p:nvSpPr>
-        <p:spPr>
-          <a:xfrm>
-            <a:off x="566928" y="3391821"/>
-            <a:ext cx="11057839" cy="254000"/>
-          </a:xfrm>
-          <a:prstGeom prst="rect">
-            <a:avLst/>
-          </a:prstGeom>
-          <a:noFill/>
-        </p:spPr>
-        <p:txBody>
-          <a:bodyPr wrap="none" lIns="0" rIns="0" tIns="0" bIns="0">
-            <a:noAutofit/>
-          </a:bodyPr>
-          <a:lstStyle/>
-          <a:p>
-            <a:r>
-              <a:rPr sz="1600" b="1">
-                <a:solidFill>
-                  <a:srgbClr val="C1C9C5"/>
-                </a:solidFill>
-                <a:latin typeface="Avenir Next"/>
-                <a:ea typeface="Hiragino Sans"/>
-                <a:cs typeface="Hiragino Sans"/>
-              </a:rPr>
-              <a:t>② エネルギー保存｜仕事は受けた熱と捨てた熱の差</a:t>
-            </a:r>
-          </a:p>
-        </p:txBody>
-      </p:sp>
-      <p:sp>
-        <p:nvSpPr>
-          <p:cNvPr id="7" name="build:ghost"/>
-          <p:cNvSpPr txBox="1"/>
-          <p:nvPr/>
-        </p:nvSpPr>
-        <p:spPr>
-          <a:xfrm>
-            <a:off x="822960" y="3683921"/>
-            <a:ext cx="10801807" cy="385762"/>
-          </a:xfrm>
-          <a:prstGeom prst="rect">
-            <a:avLst/>
-          </a:prstGeom>
-          <a:noFill/>
-        </p:spPr>
-        <p:txBody>
-          <a:bodyPr wrap="square" lIns="0" rIns="0" tIns="0" bIns="0">
-            <a:noAutofit/>
-          </a:bodyPr>
-          <a:lstStyle/>
-          <a:p>
-            <a:pPr>
-              <a:lnSpc>
-                <a:spcPct val="130000"/>
-              </a:lnSpc>
-            </a:pPr>
-            <a:r>
-              <a:rPr sz="1500">
-                <a:solidFill>
-                  <a:srgbClr val="C1BCBB"/>
-                </a:solidFill>
-                <a:latin typeface="Avenir Next"/>
-                <a:ea typeface="Hiragino Sans"/>
-                <a:cs typeface="Hiragino Sans"/>
-              </a:rPr>
-              <a:t>W = Q_H − Q_L。捨てる熱 Q_L をゼロにはできない（①で Q_L = Q_H T_L / T_H は正）。</a:t>
-            </a:r>
-          </a:p>
-        </p:txBody>
-      </p:sp>
-      <p:sp>
-        <p:nvSpPr>
-          <p:cNvPr id="8" name="Rectangle 7"/>
-          <p:cNvSpPr/>
-          <p:nvPr/>
-        </p:nvSpPr>
-        <p:spPr>
-          <a:xfrm>
-            <a:off x="566928" y="4221575"/>
-            <a:ext cx="11057839" cy="9525"/>
-          </a:xfrm>
-          <a:prstGeom prst="rect">
-            <a:avLst/>
-          </a:prstGeom>
-          <a:solidFill>
-            <a:srgbClr val="E5DCCE"/>
-          </a:solidFill>
-          <a:ln>
-            <a:noFill/>
-          </a:ln>
-          <a:effectLst/>
-        </p:spPr>
-        <p:style>
-          <a:lnRef idx="1">
-            <a:schemeClr val="accent1"/>
-          </a:lnRef>
-          <a:fillRef idx="3">
-            <a:schemeClr val="accent1"/>
-          </a:fillRef>
-          <a:effectRef idx="2">
-            <a:schemeClr val="accent1"/>
-          </a:effectRef>
-          <a:fontRef idx="minor">
-            <a:schemeClr val="lt1"/>
-          </a:fontRef>
-        </p:style>
-        <p:txBody>
-          <a:bodyPr rtlCol="0" anchor="ctr"/>
-          <a:lstStyle/>
-          <a:p>
-            <a:pPr algn="ctr"/>
-          </a:p>
-        </p:txBody>
-      </p:sp>
-      <p:sp>
-        <p:nvSpPr>
-          <p:cNvPr id="9" name="build:ghost"/>
-          <p:cNvSpPr txBox="1"/>
-          <p:nvPr/>
-        </p:nvSpPr>
-        <p:spPr>
-          <a:xfrm>
-            <a:off x="566928" y="4398867"/>
-            <a:ext cx="11057839" cy="254000"/>
-          </a:xfrm>
-          <a:prstGeom prst="rect">
-            <a:avLst/>
-          </a:prstGeom>
-          <a:noFill/>
-        </p:spPr>
-        <p:txBody>
-          <a:bodyPr wrap="none" lIns="0" rIns="0" tIns="0" bIns="0">
-            <a:noAutofit/>
-          </a:bodyPr>
-          <a:lstStyle/>
-          <a:p>
-            <a:r>
-              <a:rPr sz="1600" b="1">
-                <a:solidFill>
-                  <a:srgbClr val="C1C9C5"/>
-                </a:solidFill>
-                <a:latin typeface="Avenir Next"/>
-                <a:ea typeface="Hiragino Sans"/>
-                <a:cs typeface="Hiragino Sans"/>
-              </a:rPr>
-              <a:t>③ 効率｜η = W / Q_H = 1 − Q_L / Q_H = 1 − T_L / T_H</a:t>
-            </a:r>
-          </a:p>
-        </p:txBody>
-      </p:sp>
-      <p:sp>
-        <p:nvSpPr>
-          <p:cNvPr id="10" name="build:ghost"/>
-          <p:cNvSpPr txBox="1"/>
-          <p:nvPr/>
-        </p:nvSpPr>
-        <p:spPr>
-          <a:xfrm>
-            <a:off x="822960" y="4690967"/>
-            <a:ext cx="10801807" cy="385762"/>
-          </a:xfrm>
-          <a:prstGeom prst="rect">
-            <a:avLst/>
-          </a:prstGeom>
-          <a:noFill/>
-        </p:spPr>
-        <p:txBody>
-          <a:bodyPr wrap="square" lIns="0" rIns="0" tIns="0" bIns="0">
-            <a:noAutofit/>
-          </a:bodyPr>
-          <a:lstStyle/>
-          <a:p>
-            <a:pPr>
-              <a:lnSpc>
-                <a:spcPct val="130000"/>
-              </a:lnSpc>
-            </a:pPr>
-            <a:r>
-              <a:rPr sz="1500">
-                <a:solidFill>
-                  <a:srgbClr val="C1BCBB"/>
-                </a:solidFill>
-                <a:latin typeface="Avenir Next"/>
-                <a:ea typeface="Hiragino Sans"/>
-                <a:cs typeface="Hiragino Sans"/>
-              </a:rPr>
-              <a:t>温度の「比」だけで決まる。</a:t>
-            </a:r>
-            <a:r>
-              <a:rPr sz="1500" b="1">
-                <a:solidFill>
-                  <a:srgbClr val="C1BCBB"/>
-                </a:solidFill>
-                <a:latin typeface="Avenir Next"/>
-                <a:ea typeface="Hiragino Sans"/>
-                <a:cs typeface="Hiragino Sans"/>
-              </a:rPr>
-              <a:t>上げるには T_H を上げるか T_L を下げるか</a:t>
-            </a:r>
-            <a:r>
-              <a:rPr sz="1500">
-                <a:solidFill>
-                  <a:srgbClr val="C1BCBB"/>
-                </a:solidFill>
-                <a:latin typeface="Avenir Next"/>
-                <a:ea typeface="Hiragino Sans"/>
-                <a:cs typeface="Hiragino Sans"/>
-              </a:rPr>
-              <a:t>しかなく、T_L は環境温度で下げられない。</a:t>
-            </a:r>
-          </a:p>
-        </p:txBody>
-      </p:sp>
-      <p:sp>
-        <p:nvSpPr>
-          <p:cNvPr id="11" name="TextBox 10"/>
+            <a:r>
+              <a:rPr sz="1400">
+                <a:solidFill>
+                  <a:srgbClr val="71635B"/>
+                </a:solidFill>
+                <a:latin typeface="Avenir Next"/>
+                <a:ea typeface="Hiragino Sans"/>
+                <a:cs typeface="Hiragino Sans"/>
+              </a:rPr>
+              <a:t>高温 T_H で受けた熱と、低温 T_L で捨てた熱。可逆サイクルなら 1 周でエントロピーが元に戻るので、この 2 つの比が温度の比に等しくなる。　出典｜コード/fig_ch01.py</a:t>
+            </a:r>
+          </a:p>
+        </p:txBody>
+      </p:sp>
+      <p:sp>
+        <p:nvSpPr>
+          <p:cNvPr id="5" name="TextBox 4"/>
           <p:cNvSpPr txBox="1"/>
           <p:nvPr/>
         </p:nvSpPr>

--- a/スライド/ch01.pptx
+++ b/スライド/ch01.pptx
@@ -1583,7 +1583,7 @@
           <a:p/>
           <a:p>
             <a:r>
-              <a:t>_class: sections</a:t>
+              <a:t>_class: figure-full</a:t>
             </a:r>
           </a:p>
         </p:txBody>
@@ -1653,13 +1653,13 @@
           <a:lstStyle/>
           <a:p>
             <a:r>
-              <a:t>導出は板書でも可。ポイントは「全部取ると風が止まる」の直感と、最大が 1/3 減速という具体値。</a:t>
+              <a:t>前の 1 枚に ② を足しただけ。薄い段はまだ出していない段。</a:t>
             </a:r>
           </a:p>
           <a:p/>
           <a:p>
             <a:r>
-              <a:t>_class: sections</a:t>
+              <a:t>_class: figure-full</a:t>
             </a:r>
           </a:p>
         </p:txBody>
@@ -1729,13 +1729,13 @@
           <a:lstStyle/>
           <a:p>
             <a:r>
-              <a:t>導出は板書でも可。ポイントは「全部取ると風が止まる」の直感と、最大が 1/3 減速という具体値。</a:t>
+              <a:t>前の 1 枚に ③ を足しただけ。薄い段はまだ出していない段。</a:t>
             </a:r>
           </a:p>
           <a:p/>
           <a:p>
             <a:r>
-              <a:t>_class: sections</a:t>
+              <a:t>_class: figure-full</a:t>
             </a:r>
           </a:p>
         </p:txBody>
@@ -12194,59 +12194,14 @@
       <p:grpSpPr/>
       <p:sp>
         <p:nvSpPr>
-          <p:cNvPr id="2" name="TextBox 1"/>
+          <p:cNvPr id="2" name="edge:title"/>
           <p:cNvSpPr txBox="1"/>
           <p:nvPr/>
         </p:nvSpPr>
         <p:spPr>
           <a:xfrm>
-            <a:off x="566928" y="457200"/>
-            <a:ext cx="11057839" cy="658368"/>
-          </a:xfrm>
-          <a:prstGeom prst="rect">
-            <a:avLst/>
-          </a:prstGeom>
-          <a:noFill/>
-        </p:spPr>
-        <p:txBody>
-          <a:bodyPr wrap="square" lIns="0" rIns="0" tIns="0" bIns="0" anchor="ctr">
-            <a:noAutofit/>
-          </a:bodyPr>
-          <a:lstStyle/>
-          <a:p>
-            <a:pPr>
-              <a:lnSpc>
-                <a:spcPct val="106000"/>
-              </a:lnSpc>
-              <a:defRPr sz="3390" b="1">
-                <a:solidFill>
-                  <a:srgbClr val="7C332A"/>
-                </a:solidFill>
-                <a:latin typeface="Avenir Next"/>
-                <a:ea typeface="Hiragino Sans"/>
-                <a:cs typeface="Hiragino Sans"/>
-              </a:defRPr>
-            </a:pPr>
-            <a:r>
-              <a:rPr>
-                <a:ea typeface="Hiragino Sans"/>
-                <a:cs typeface="Hiragino Sans"/>
-              </a:rPr>
-              <a:t>導出 — ベッツの限界（運動量理論）</a:t>
-            </a:r>
-          </a:p>
-        </p:txBody>
-      </p:sp>
-      <p:sp>
-        <p:nvSpPr>
-          <p:cNvPr id="3" name="TextBox 2"/>
-          <p:cNvSpPr txBox="1"/>
-          <p:nvPr/>
-        </p:nvSpPr>
-        <p:spPr>
-          <a:xfrm>
-            <a:off x="566928" y="2229993"/>
-            <a:ext cx="11057839" cy="254000"/>
+            <a:off x="566928" y="146304"/>
+            <a:ext cx="11057839" cy="457200"/>
           </a:xfrm>
           <a:prstGeom prst="rect">
             <a:avLst/>
@@ -12259,30 +12214,60 @@
           </a:bodyPr>
           <a:lstStyle/>
           <a:p>
-            <a:r>
-              <a:rPr sz="1600" b="1">
-                <a:solidFill>
-                  <a:srgbClr val="5C7268"/>
-                </a:solidFill>
-                <a:latin typeface="Avenir Next"/>
-                <a:ea typeface="Hiragino Sans"/>
-                <a:cs typeface="Hiragino Sans"/>
-              </a:rPr>
-              <a:t>① 風を減速させて取り出す｜上流 v₁ → ロータ面 v → 下流 v₂</a:t>
-            </a:r>
-          </a:p>
-        </p:txBody>
-      </p:sp>
-      <p:sp>
-        <p:nvSpPr>
-          <p:cNvPr id="4" name="TextBox 3"/>
+            <a:pPr>
+              <a:defRPr sz="2400" b="1">
+                <a:solidFill>
+                  <a:srgbClr val="7C332A"/>
+                </a:solidFill>
+                <a:latin typeface="Avenir Next"/>
+                <a:ea typeface="Hiragino Sans"/>
+                <a:cs typeface="Hiragino Sans"/>
+              </a:defRPr>
+            </a:pPr>
+            <a:r>
+              <a:rPr>
+                <a:ea typeface="Hiragino Sans"/>
+                <a:cs typeface="Hiragino Sans"/>
+              </a:rPr>
+              <a:t>導出 — ベッツの限界（運動量理論）</a:t>
+            </a:r>
+          </a:p>
+        </p:txBody>
+      </p:sp>
+      <p:pic>
+        <p:nvPicPr>
+          <p:cNvPr id="3" name="Picture 2" descr="ch01_deriv_betz_1.png"/>
+          <p:cNvPicPr>
+            <a:picLocks noChangeAspect="1"/>
+          </p:cNvPicPr>
+          <p:nvPr/>
+        </p:nvPicPr>
+        <p:blipFill>
+          <a:blip r:embed="rId2"/>
+          <a:stretch>
+            <a:fillRect/>
+          </a:stretch>
+        </p:blipFill>
+        <p:spPr>
+          <a:xfrm>
+            <a:off x="607256" y="713232"/>
+            <a:ext cx="10977182" cy="5532120"/>
+          </a:xfrm>
+          <a:prstGeom prst="rect">
+            <a:avLst/>
+          </a:prstGeom>
+        </p:spPr>
+      </p:pic>
+      <p:sp>
+        <p:nvSpPr>
+          <p:cNvPr id="4" name="edge:caption"/>
           <p:cNvSpPr txBox="1"/>
           <p:nvPr/>
         </p:nvSpPr>
         <p:spPr>
           <a:xfrm>
-            <a:off x="822960" y="2522093"/>
-            <a:ext cx="10801807" cy="385762"/>
+            <a:off x="228600" y="6300216"/>
+            <a:ext cx="11734495" cy="310896"/>
           </a:xfrm>
           <a:prstGeom prst="rect">
             <a:avLst/>
@@ -12295,314 +12280,24 @@
           </a:bodyPr>
           <a:lstStyle/>
           <a:p>
-            <a:pPr>
-              <a:lnSpc>
-                <a:spcPct val="130000"/>
-              </a:lnSpc>
-            </a:pPr>
-            <a:r>
-              <a:rPr sz="1500">
-                <a:solidFill>
-                  <a:srgbClr val="33221E"/>
-                </a:solidFill>
-                <a:latin typeface="Avenir Next"/>
-                <a:ea typeface="Hiragino Sans"/>
-                <a:cs typeface="Hiragino Sans"/>
-              </a:rPr>
-              <a:t>ロータ面の風速は上下流の平均 v = (v₁ + v₂)/2。減速の割合を a = (v₁ − v)/v₁ とおく（誘導係数）。</a:t>
-            </a:r>
-          </a:p>
-        </p:txBody>
-      </p:sp>
-      <p:sp>
-        <p:nvSpPr>
-          <p:cNvPr id="5" name="Rectangle 4"/>
-          <p:cNvSpPr/>
-          <p:nvPr/>
-        </p:nvSpPr>
-        <p:spPr>
-          <a:xfrm>
-            <a:off x="566928" y="3059747"/>
-            <a:ext cx="11057839" cy="9525"/>
-          </a:xfrm>
-          <a:prstGeom prst="rect">
-            <a:avLst/>
-          </a:prstGeom>
-          <a:solidFill>
-            <a:srgbClr val="E5DCCE"/>
-          </a:solidFill>
-          <a:ln>
-            <a:noFill/>
-          </a:ln>
-          <a:effectLst/>
-        </p:spPr>
-        <p:style>
-          <a:lnRef idx="1">
-            <a:schemeClr val="accent1"/>
-          </a:lnRef>
-          <a:fillRef idx="3">
-            <a:schemeClr val="accent1"/>
-          </a:fillRef>
-          <a:effectRef idx="2">
-            <a:schemeClr val="accent1"/>
-          </a:effectRef>
-          <a:fontRef idx="minor">
-            <a:schemeClr val="lt1"/>
-          </a:fontRef>
-        </p:style>
-        <p:txBody>
-          <a:bodyPr rtlCol="0" anchor="ctr"/>
-          <a:lstStyle/>
-          <a:p>
             <a:pPr algn="ctr"/>
-          </a:p>
-        </p:txBody>
-      </p:sp>
-      <p:sp>
-        <p:nvSpPr>
-          <p:cNvPr id="6" name="build:ghost"/>
-          <p:cNvSpPr txBox="1"/>
-          <p:nvPr/>
-        </p:nvSpPr>
-        <p:spPr>
-          <a:xfrm>
-            <a:off x="566928" y="3237039"/>
-            <a:ext cx="11057839" cy="254000"/>
-          </a:xfrm>
-          <a:prstGeom prst="rect">
-            <a:avLst/>
-          </a:prstGeom>
-          <a:noFill/>
-        </p:spPr>
-        <p:txBody>
-          <a:bodyPr wrap="none" lIns="0" rIns="0" tIns="0" bIns="0">
-            <a:noAutofit/>
-          </a:bodyPr>
-          <a:lstStyle/>
-          <a:p>
-            <a:r>
-              <a:rPr sz="1600" b="1">
-                <a:solidFill>
-                  <a:srgbClr val="C1C9C5"/>
-                </a:solidFill>
-                <a:latin typeface="Avenir Next"/>
-                <a:ea typeface="Hiragino Sans"/>
-                <a:cs typeface="Hiragino Sans"/>
-              </a:rPr>
-              <a:t>② 取り出す仕事率｜P = 力 × 速度 = ρAv(v₁ − v₂) × v</a:t>
-            </a:r>
-          </a:p>
-        </p:txBody>
-      </p:sp>
-      <p:sp>
-        <p:nvSpPr>
-          <p:cNvPr id="7" name="build:ghost"/>
-          <p:cNvSpPr txBox="1"/>
-          <p:nvPr/>
-        </p:nvSpPr>
-        <p:spPr>
-          <a:xfrm>
-            <a:off x="822960" y="3529139"/>
-            <a:ext cx="10801807" cy="385762"/>
-          </a:xfrm>
-          <a:prstGeom prst="rect">
-            <a:avLst/>
-          </a:prstGeom>
-          <a:noFill/>
-        </p:spPr>
-        <p:txBody>
-          <a:bodyPr wrap="square" lIns="0" rIns="0" tIns="0" bIns="0">
-            <a:noAutofit/>
-          </a:bodyPr>
-          <a:lstStyle/>
-          <a:p>
-            <a:pPr>
-              <a:lnSpc>
-                <a:spcPct val="130000"/>
-              </a:lnSpc>
-            </a:pPr>
-            <a:r>
-              <a:rPr sz="1500">
-                <a:solidFill>
-                  <a:srgbClr val="C1BCBB"/>
-                </a:solidFill>
-                <a:latin typeface="Avenir Next"/>
-                <a:ea typeface="Hiragino Sans"/>
-                <a:cs typeface="Hiragino Sans"/>
-              </a:rPr>
-              <a:t>v₂ = v₁(1 − 2a) を代入すると </a:t>
-            </a:r>
-            <a:r>
-              <a:rPr sz="1500" b="1">
-                <a:solidFill>
-                  <a:srgbClr val="C1BCBB"/>
-                </a:solidFill>
-                <a:latin typeface="Avenir Next"/>
-                <a:ea typeface="Hiragino Sans"/>
-                <a:cs typeface="Hiragino Sans"/>
-              </a:rPr>
-              <a:t>P = ½ρA v₁³ · 4a(1 − a)²</a:t>
-            </a:r>
-            <a:r>
-              <a:rPr sz="1500">
-                <a:solidFill>
-                  <a:srgbClr val="C1BCBB"/>
-                </a:solidFill>
-                <a:latin typeface="Avenir Next"/>
-                <a:ea typeface="Hiragino Sans"/>
-                <a:cs typeface="Hiragino Sans"/>
-              </a:rPr>
-              <a:t>。C_p(a) = 4a(1 − a)² が「取り出せる割合」。</a:t>
-            </a:r>
-          </a:p>
-        </p:txBody>
-      </p:sp>
-      <p:sp>
-        <p:nvSpPr>
-          <p:cNvPr id="8" name="Rectangle 7"/>
-          <p:cNvSpPr/>
-          <p:nvPr/>
-        </p:nvSpPr>
-        <p:spPr>
-          <a:xfrm>
-            <a:off x="566928" y="4066793"/>
-            <a:ext cx="11057839" cy="9525"/>
-          </a:xfrm>
-          <a:prstGeom prst="rect">
-            <a:avLst/>
-          </a:prstGeom>
-          <a:solidFill>
-            <a:srgbClr val="E5DCCE"/>
-          </a:solidFill>
-          <a:ln>
-            <a:noFill/>
-          </a:ln>
-          <a:effectLst/>
-        </p:spPr>
-        <p:style>
-          <a:lnRef idx="1">
-            <a:schemeClr val="accent1"/>
-          </a:lnRef>
-          <a:fillRef idx="3">
-            <a:schemeClr val="accent1"/>
-          </a:fillRef>
-          <a:effectRef idx="2">
-            <a:schemeClr val="accent1"/>
-          </a:effectRef>
-          <a:fontRef idx="minor">
-            <a:schemeClr val="lt1"/>
-          </a:fontRef>
-        </p:style>
-        <p:txBody>
-          <a:bodyPr rtlCol="0" anchor="ctr"/>
-          <a:lstStyle/>
-          <a:p>
-            <a:pPr algn="ctr"/>
-          </a:p>
-        </p:txBody>
-      </p:sp>
-      <p:sp>
-        <p:nvSpPr>
-          <p:cNvPr id="9" name="build:ghost"/>
-          <p:cNvSpPr txBox="1"/>
-          <p:nvPr/>
-        </p:nvSpPr>
-        <p:spPr>
-          <a:xfrm>
-            <a:off x="566928" y="4244085"/>
-            <a:ext cx="11057839" cy="254000"/>
-          </a:xfrm>
-          <a:prstGeom prst="rect">
-            <a:avLst/>
-          </a:prstGeom>
-          <a:noFill/>
-        </p:spPr>
-        <p:txBody>
-          <a:bodyPr wrap="none" lIns="0" rIns="0" tIns="0" bIns="0">
-            <a:noAutofit/>
-          </a:bodyPr>
-          <a:lstStyle/>
-          <a:p>
-            <a:r>
-              <a:rPr sz="1600" b="1">
-                <a:solidFill>
-                  <a:srgbClr val="C1C9C5"/>
-                </a:solidFill>
-                <a:latin typeface="Avenir Next"/>
-                <a:ea typeface="Hiragino Sans"/>
-                <a:cs typeface="Hiragino Sans"/>
-              </a:rPr>
-              <a:t>③ 最大化｜dC_p/da = 0 → a = 1/3</a:t>
-            </a:r>
-          </a:p>
-        </p:txBody>
-      </p:sp>
-      <p:sp>
-        <p:nvSpPr>
-          <p:cNvPr id="10" name="build:ghost"/>
-          <p:cNvSpPr txBox="1"/>
-          <p:nvPr/>
-        </p:nvSpPr>
-        <p:spPr>
-          <a:xfrm>
-            <a:off x="822960" y="4536185"/>
-            <a:ext cx="10801807" cy="695325"/>
-          </a:xfrm>
-          <a:prstGeom prst="rect">
-            <a:avLst/>
-          </a:prstGeom>
-          <a:noFill/>
-        </p:spPr>
-        <p:txBody>
-          <a:bodyPr wrap="square" lIns="0" rIns="0" tIns="0" bIns="0">
-            <a:noAutofit/>
-          </a:bodyPr>
-          <a:lstStyle/>
-          <a:p>
-            <a:pPr>
-              <a:lnSpc>
-                <a:spcPct val="130000"/>
-              </a:lnSpc>
-            </a:pPr>
-            <a:r>
-              <a:rPr sz="1500">
-                <a:solidFill>
-                  <a:srgbClr val="C1BCBB"/>
-                </a:solidFill>
-                <a:latin typeface="Avenir Next"/>
-                <a:ea typeface="Hiragino Sans"/>
-                <a:cs typeface="Hiragino Sans"/>
-              </a:rPr>
-              <a:t>C_p,max = 4 · (1/3) · (2/3)² = </a:t>
-            </a:r>
-            <a:r>
-              <a:rPr sz="1500" b="1">
-                <a:solidFill>
-                  <a:srgbClr val="C1BCBB"/>
-                </a:solidFill>
-                <a:latin typeface="Avenir Next"/>
-                <a:ea typeface="Hiragino Sans"/>
-                <a:cs typeface="Hiragino Sans"/>
-              </a:rPr>
-              <a:t>16/27 = 0.593</a:t>
-            </a:r>
-            <a:r>
-              <a:rPr sz="1500">
-                <a:solidFill>
-                  <a:srgbClr val="C1BCBB"/>
-                </a:solidFill>
-                <a:latin typeface="Avenir Next"/>
-                <a:ea typeface="Hiragino Sans"/>
-                <a:cs typeface="Hiragino Sans"/>
-              </a:rPr>
-              <a:t>。風を止めきると（a = 1/2 で v₂ = 0）後ろに空気が流れ込めず、取れる量は減る。</a:t>
-            </a:r>
-          </a:p>
-        </p:txBody>
-      </p:sp>
-      <p:sp>
-        <p:nvSpPr>
-          <p:cNvPr id="11" name="TextBox 10"/>
+            <a:r>
+              <a:rPr sz="1400">
+                <a:solidFill>
+                  <a:srgbClr val="71635B"/>
+                </a:solidFill>
+                <a:latin typeface="Avenir Next"/>
+                <a:ea typeface="Hiragino Sans"/>
+                <a:cs typeface="Hiragino Sans"/>
+              </a:rPr>
+              <a:t>ロータ面の風速は上下流の平均 v = (v₁ + v₂)/2。減速の割合を a = (v₁ − v)/v₁ とおく（誘導係数）。　出典｜コード/fig_ch01.py</a:t>
+            </a:r>
+          </a:p>
+        </p:txBody>
+      </p:sp>
+      <p:sp>
+        <p:nvSpPr>
+          <p:cNvPr id="5" name="TextBox 4"/>
           <p:cNvSpPr txBox="1"/>
           <p:nvPr/>
         </p:nvSpPr>
@@ -12658,59 +12353,14 @@
       <p:grpSpPr/>
       <p:sp>
         <p:nvSpPr>
-          <p:cNvPr id="2" name="TextBox 1"/>
+          <p:cNvPr id="2" name="edge:title"/>
           <p:cNvSpPr txBox="1"/>
           <p:nvPr/>
         </p:nvSpPr>
         <p:spPr>
           <a:xfrm>
-            <a:off x="566928" y="457200"/>
-            <a:ext cx="11057839" cy="658368"/>
-          </a:xfrm>
-          <a:prstGeom prst="rect">
-            <a:avLst/>
-          </a:prstGeom>
-          <a:noFill/>
-        </p:spPr>
-        <p:txBody>
-          <a:bodyPr wrap="square" lIns="0" rIns="0" tIns="0" bIns="0" anchor="ctr">
-            <a:noAutofit/>
-          </a:bodyPr>
-          <a:lstStyle/>
-          <a:p>
-            <a:pPr>
-              <a:lnSpc>
-                <a:spcPct val="106000"/>
-              </a:lnSpc>
-              <a:defRPr sz="3390" b="1">
-                <a:solidFill>
-                  <a:srgbClr val="7C332A"/>
-                </a:solidFill>
-                <a:latin typeface="Avenir Next"/>
-                <a:ea typeface="Hiragino Sans"/>
-                <a:cs typeface="Hiragino Sans"/>
-              </a:defRPr>
-            </a:pPr>
-            <a:r>
-              <a:rPr>
-                <a:ea typeface="Hiragino Sans"/>
-                <a:cs typeface="Hiragino Sans"/>
-              </a:rPr>
-              <a:t>導出 — ベッツの限界（運動量理論）</a:t>
-            </a:r>
-          </a:p>
-        </p:txBody>
-      </p:sp>
-      <p:sp>
-        <p:nvSpPr>
-          <p:cNvPr id="3" name="TextBox 2"/>
-          <p:cNvSpPr txBox="1"/>
-          <p:nvPr/>
-        </p:nvSpPr>
-        <p:spPr>
-          <a:xfrm>
-            <a:off x="566928" y="2229993"/>
-            <a:ext cx="11057839" cy="254000"/>
+            <a:off x="566928" y="146304"/>
+            <a:ext cx="11057839" cy="457200"/>
           </a:xfrm>
           <a:prstGeom prst="rect">
             <a:avLst/>
@@ -12723,30 +12373,60 @@
           </a:bodyPr>
           <a:lstStyle/>
           <a:p>
-            <a:r>
-              <a:rPr sz="1600" b="1">
-                <a:solidFill>
-                  <a:srgbClr val="5C7268"/>
-                </a:solidFill>
-                <a:latin typeface="Avenir Next"/>
-                <a:ea typeface="Hiragino Sans"/>
-                <a:cs typeface="Hiragino Sans"/>
-              </a:rPr>
-              <a:t>① 風を減速させて取り出す｜上流 v₁ → ロータ面 v → 下流 v₂</a:t>
-            </a:r>
-          </a:p>
-        </p:txBody>
-      </p:sp>
-      <p:sp>
-        <p:nvSpPr>
-          <p:cNvPr id="4" name="TextBox 3"/>
+            <a:pPr>
+              <a:defRPr sz="2400" b="1">
+                <a:solidFill>
+                  <a:srgbClr val="7C332A"/>
+                </a:solidFill>
+                <a:latin typeface="Avenir Next"/>
+                <a:ea typeface="Hiragino Sans"/>
+                <a:cs typeface="Hiragino Sans"/>
+              </a:defRPr>
+            </a:pPr>
+            <a:r>
+              <a:rPr>
+                <a:ea typeface="Hiragino Sans"/>
+                <a:cs typeface="Hiragino Sans"/>
+              </a:rPr>
+              <a:t>導出 — ベッツの限界（運動量理論）</a:t>
+            </a:r>
+          </a:p>
+        </p:txBody>
+      </p:sp>
+      <p:pic>
+        <p:nvPicPr>
+          <p:cNvPr id="3" name="Picture 2" descr="ch01_deriv_betz_2.png"/>
+          <p:cNvPicPr>
+            <a:picLocks noChangeAspect="1"/>
+          </p:cNvPicPr>
+          <p:nvPr/>
+        </p:nvPicPr>
+        <p:blipFill>
+          <a:blip r:embed="rId2"/>
+          <a:stretch>
+            <a:fillRect/>
+          </a:stretch>
+        </p:blipFill>
+        <p:spPr>
+          <a:xfrm>
+            <a:off x="607256" y="713232"/>
+            <a:ext cx="10977182" cy="5532120"/>
+          </a:xfrm>
+          <a:prstGeom prst="rect">
+            <a:avLst/>
+          </a:prstGeom>
+        </p:spPr>
+      </p:pic>
+      <p:sp>
+        <p:nvSpPr>
+          <p:cNvPr id="4" name="edge:caption"/>
           <p:cNvSpPr txBox="1"/>
           <p:nvPr/>
         </p:nvSpPr>
         <p:spPr>
           <a:xfrm>
-            <a:off x="822960" y="2522093"/>
-            <a:ext cx="10801807" cy="385762"/>
+            <a:off x="228600" y="6300216"/>
+            <a:ext cx="11734495" cy="310896"/>
           </a:xfrm>
           <a:prstGeom prst="rect">
             <a:avLst/>
@@ -12759,314 +12439,24 @@
           </a:bodyPr>
           <a:lstStyle/>
           <a:p>
-            <a:pPr>
-              <a:lnSpc>
-                <a:spcPct val="130000"/>
-              </a:lnSpc>
-            </a:pPr>
-            <a:r>
-              <a:rPr sz="1500">
-                <a:solidFill>
-                  <a:srgbClr val="33221E"/>
-                </a:solidFill>
-                <a:latin typeface="Avenir Next"/>
-                <a:ea typeface="Hiragino Sans"/>
-                <a:cs typeface="Hiragino Sans"/>
-              </a:rPr>
-              <a:t>ロータ面の風速は上下流の平均 v = (v₁ + v₂)/2。減速の割合を a = (v₁ − v)/v₁ とおく（誘導係数）。</a:t>
-            </a:r>
-          </a:p>
-        </p:txBody>
-      </p:sp>
-      <p:sp>
-        <p:nvSpPr>
-          <p:cNvPr id="5" name="Rectangle 4"/>
-          <p:cNvSpPr/>
-          <p:nvPr/>
-        </p:nvSpPr>
-        <p:spPr>
-          <a:xfrm>
-            <a:off x="566928" y="3059747"/>
-            <a:ext cx="11057839" cy="9525"/>
-          </a:xfrm>
-          <a:prstGeom prst="rect">
-            <a:avLst/>
-          </a:prstGeom>
-          <a:solidFill>
-            <a:srgbClr val="E5DCCE"/>
-          </a:solidFill>
-          <a:ln>
-            <a:noFill/>
-          </a:ln>
-          <a:effectLst/>
-        </p:spPr>
-        <p:style>
-          <a:lnRef idx="1">
-            <a:schemeClr val="accent1"/>
-          </a:lnRef>
-          <a:fillRef idx="3">
-            <a:schemeClr val="accent1"/>
-          </a:fillRef>
-          <a:effectRef idx="2">
-            <a:schemeClr val="accent1"/>
-          </a:effectRef>
-          <a:fontRef idx="minor">
-            <a:schemeClr val="lt1"/>
-          </a:fontRef>
-        </p:style>
-        <p:txBody>
-          <a:bodyPr rtlCol="0" anchor="ctr"/>
-          <a:lstStyle/>
-          <a:p>
             <a:pPr algn="ctr"/>
-          </a:p>
-        </p:txBody>
-      </p:sp>
-      <p:sp>
-        <p:nvSpPr>
-          <p:cNvPr id="6" name="TextBox 5"/>
-          <p:cNvSpPr txBox="1"/>
-          <p:nvPr/>
-        </p:nvSpPr>
-        <p:spPr>
-          <a:xfrm>
-            <a:off x="566928" y="3237039"/>
-            <a:ext cx="11057839" cy="254000"/>
-          </a:xfrm>
-          <a:prstGeom prst="rect">
-            <a:avLst/>
-          </a:prstGeom>
-          <a:noFill/>
-        </p:spPr>
-        <p:txBody>
-          <a:bodyPr wrap="none" lIns="0" rIns="0" tIns="0" bIns="0">
-            <a:noAutofit/>
-          </a:bodyPr>
-          <a:lstStyle/>
-          <a:p>
-            <a:r>
-              <a:rPr sz="1600" b="1">
-                <a:solidFill>
-                  <a:srgbClr val="5C7268"/>
-                </a:solidFill>
-                <a:latin typeface="Avenir Next"/>
-                <a:ea typeface="Hiragino Sans"/>
-                <a:cs typeface="Hiragino Sans"/>
-              </a:rPr>
-              <a:t>② 取り出す仕事率｜P = 力 × 速度 = ρAv(v₁ − v₂) × v</a:t>
-            </a:r>
-          </a:p>
-        </p:txBody>
-      </p:sp>
-      <p:sp>
-        <p:nvSpPr>
-          <p:cNvPr id="7" name="TextBox 6"/>
-          <p:cNvSpPr txBox="1"/>
-          <p:nvPr/>
-        </p:nvSpPr>
-        <p:spPr>
-          <a:xfrm>
-            <a:off x="822960" y="3529139"/>
-            <a:ext cx="10801807" cy="385762"/>
-          </a:xfrm>
-          <a:prstGeom prst="rect">
-            <a:avLst/>
-          </a:prstGeom>
-          <a:noFill/>
-        </p:spPr>
-        <p:txBody>
-          <a:bodyPr wrap="square" lIns="0" rIns="0" tIns="0" bIns="0">
-            <a:noAutofit/>
-          </a:bodyPr>
-          <a:lstStyle/>
-          <a:p>
-            <a:pPr>
-              <a:lnSpc>
-                <a:spcPct val="130000"/>
-              </a:lnSpc>
-            </a:pPr>
-            <a:r>
-              <a:rPr sz="1500">
-                <a:solidFill>
-                  <a:srgbClr val="33221E"/>
-                </a:solidFill>
-                <a:latin typeface="Avenir Next"/>
-                <a:ea typeface="Hiragino Sans"/>
-                <a:cs typeface="Hiragino Sans"/>
-              </a:rPr>
-              <a:t>v₂ = v₁(1 − 2a) を代入すると </a:t>
-            </a:r>
-            <a:r>
-              <a:rPr sz="1500" b="1">
-                <a:solidFill>
-                  <a:srgbClr val="33221E"/>
-                </a:solidFill>
-                <a:latin typeface="Avenir Next"/>
-                <a:ea typeface="Hiragino Sans"/>
-                <a:cs typeface="Hiragino Sans"/>
-              </a:rPr>
-              <a:t>P = ½ρA v₁³ · 4a(1 − a)²</a:t>
-            </a:r>
-            <a:r>
-              <a:rPr sz="1500">
-                <a:solidFill>
-                  <a:srgbClr val="33221E"/>
-                </a:solidFill>
-                <a:latin typeface="Avenir Next"/>
-                <a:ea typeface="Hiragino Sans"/>
-                <a:cs typeface="Hiragino Sans"/>
-              </a:rPr>
-              <a:t>。C_p(a) = 4a(1 − a)² が「取り出せる割合」。</a:t>
-            </a:r>
-          </a:p>
-        </p:txBody>
-      </p:sp>
-      <p:sp>
-        <p:nvSpPr>
-          <p:cNvPr id="8" name="Rectangle 7"/>
-          <p:cNvSpPr/>
-          <p:nvPr/>
-        </p:nvSpPr>
-        <p:spPr>
-          <a:xfrm>
-            <a:off x="566928" y="4066793"/>
-            <a:ext cx="11057839" cy="9525"/>
-          </a:xfrm>
-          <a:prstGeom prst="rect">
-            <a:avLst/>
-          </a:prstGeom>
-          <a:solidFill>
-            <a:srgbClr val="E5DCCE"/>
-          </a:solidFill>
-          <a:ln>
-            <a:noFill/>
-          </a:ln>
-          <a:effectLst/>
-        </p:spPr>
-        <p:style>
-          <a:lnRef idx="1">
-            <a:schemeClr val="accent1"/>
-          </a:lnRef>
-          <a:fillRef idx="3">
-            <a:schemeClr val="accent1"/>
-          </a:fillRef>
-          <a:effectRef idx="2">
-            <a:schemeClr val="accent1"/>
-          </a:effectRef>
-          <a:fontRef idx="minor">
-            <a:schemeClr val="lt1"/>
-          </a:fontRef>
-        </p:style>
-        <p:txBody>
-          <a:bodyPr rtlCol="0" anchor="ctr"/>
-          <a:lstStyle/>
-          <a:p>
-            <a:pPr algn="ctr"/>
-          </a:p>
-        </p:txBody>
-      </p:sp>
-      <p:sp>
-        <p:nvSpPr>
-          <p:cNvPr id="9" name="build:ghost"/>
-          <p:cNvSpPr txBox="1"/>
-          <p:nvPr/>
-        </p:nvSpPr>
-        <p:spPr>
-          <a:xfrm>
-            <a:off x="566928" y="4244085"/>
-            <a:ext cx="11057839" cy="254000"/>
-          </a:xfrm>
-          <a:prstGeom prst="rect">
-            <a:avLst/>
-          </a:prstGeom>
-          <a:noFill/>
-        </p:spPr>
-        <p:txBody>
-          <a:bodyPr wrap="none" lIns="0" rIns="0" tIns="0" bIns="0">
-            <a:noAutofit/>
-          </a:bodyPr>
-          <a:lstStyle/>
-          <a:p>
-            <a:r>
-              <a:rPr sz="1600" b="1">
-                <a:solidFill>
-                  <a:srgbClr val="C1C9C5"/>
-                </a:solidFill>
-                <a:latin typeface="Avenir Next"/>
-                <a:ea typeface="Hiragino Sans"/>
-                <a:cs typeface="Hiragino Sans"/>
-              </a:rPr>
-              <a:t>③ 最大化｜dC_p/da = 0 → a = 1/3</a:t>
-            </a:r>
-          </a:p>
-        </p:txBody>
-      </p:sp>
-      <p:sp>
-        <p:nvSpPr>
-          <p:cNvPr id="10" name="build:ghost"/>
-          <p:cNvSpPr txBox="1"/>
-          <p:nvPr/>
-        </p:nvSpPr>
-        <p:spPr>
-          <a:xfrm>
-            <a:off x="822960" y="4536185"/>
-            <a:ext cx="10801807" cy="695325"/>
-          </a:xfrm>
-          <a:prstGeom prst="rect">
-            <a:avLst/>
-          </a:prstGeom>
-          <a:noFill/>
-        </p:spPr>
-        <p:txBody>
-          <a:bodyPr wrap="square" lIns="0" rIns="0" tIns="0" bIns="0">
-            <a:noAutofit/>
-          </a:bodyPr>
-          <a:lstStyle/>
-          <a:p>
-            <a:pPr>
-              <a:lnSpc>
-                <a:spcPct val="130000"/>
-              </a:lnSpc>
-            </a:pPr>
-            <a:r>
-              <a:rPr sz="1500">
-                <a:solidFill>
-                  <a:srgbClr val="C1BCBB"/>
-                </a:solidFill>
-                <a:latin typeface="Avenir Next"/>
-                <a:ea typeface="Hiragino Sans"/>
-                <a:cs typeface="Hiragino Sans"/>
-              </a:rPr>
-              <a:t>C_p,max = 4 · (1/3) · (2/3)² = </a:t>
-            </a:r>
-            <a:r>
-              <a:rPr sz="1500" b="1">
-                <a:solidFill>
-                  <a:srgbClr val="C1BCBB"/>
-                </a:solidFill>
-                <a:latin typeface="Avenir Next"/>
-                <a:ea typeface="Hiragino Sans"/>
-                <a:cs typeface="Hiragino Sans"/>
-              </a:rPr>
-              <a:t>16/27 = 0.593</a:t>
-            </a:r>
-            <a:r>
-              <a:rPr sz="1500">
-                <a:solidFill>
-                  <a:srgbClr val="C1BCBB"/>
-                </a:solidFill>
-                <a:latin typeface="Avenir Next"/>
-                <a:ea typeface="Hiragino Sans"/>
-                <a:cs typeface="Hiragino Sans"/>
-              </a:rPr>
-              <a:t>。風を止めきると（a = 1/2 で v₂ = 0）後ろに空気が流れ込めず、取れる量は減る。</a:t>
-            </a:r>
-          </a:p>
-        </p:txBody>
-      </p:sp>
-      <p:sp>
-        <p:nvSpPr>
-          <p:cNvPr id="11" name="TextBox 10"/>
+            <a:r>
+              <a:rPr sz="1400">
+                <a:solidFill>
+                  <a:srgbClr val="71635B"/>
+                </a:solidFill>
+                <a:latin typeface="Avenir Next"/>
+                <a:ea typeface="Hiragino Sans"/>
+                <a:cs typeface="Hiragino Sans"/>
+              </a:rPr>
+              <a:t>v₂ = v₁(1 − 2a) を代入すると P = ½ρA v₁³ · 4a(1 − a)²。C_p(a) = 4a(1 − a)² が「取り出せる割合」。　出典｜コード/fig_ch01.py</a:t>
+            </a:r>
+          </a:p>
+        </p:txBody>
+      </p:sp>
+      <p:sp>
+        <p:nvSpPr>
+          <p:cNvPr id="5" name="TextBox 4"/>
           <p:cNvSpPr txBox="1"/>
           <p:nvPr/>
         </p:nvSpPr>
@@ -13122,59 +12512,14 @@
       <p:grpSpPr/>
       <p:sp>
         <p:nvSpPr>
-          <p:cNvPr id="2" name="TextBox 1"/>
+          <p:cNvPr id="2" name="edge:title"/>
           <p:cNvSpPr txBox="1"/>
           <p:nvPr/>
         </p:nvSpPr>
         <p:spPr>
           <a:xfrm>
-            <a:off x="566928" y="457200"/>
-            <a:ext cx="11057839" cy="658368"/>
-          </a:xfrm>
-          <a:prstGeom prst="rect">
-            <a:avLst/>
-          </a:prstGeom>
-          <a:noFill/>
-        </p:spPr>
-        <p:txBody>
-          <a:bodyPr wrap="square" lIns="0" rIns="0" tIns="0" bIns="0" anchor="ctr">
-            <a:noAutofit/>
-          </a:bodyPr>
-          <a:lstStyle/>
-          <a:p>
-            <a:pPr>
-              <a:lnSpc>
-                <a:spcPct val="106000"/>
-              </a:lnSpc>
-              <a:defRPr sz="3390" b="1">
-                <a:solidFill>
-                  <a:srgbClr val="7C332A"/>
-                </a:solidFill>
-                <a:latin typeface="Avenir Next"/>
-                <a:ea typeface="Hiragino Sans"/>
-                <a:cs typeface="Hiragino Sans"/>
-              </a:defRPr>
-            </a:pPr>
-            <a:r>
-              <a:rPr>
-                <a:ea typeface="Hiragino Sans"/>
-                <a:cs typeface="Hiragino Sans"/>
-              </a:rPr>
-              <a:t>導出 — ベッツの限界（運動量理論）</a:t>
-            </a:r>
-          </a:p>
-        </p:txBody>
-      </p:sp>
-      <p:sp>
-        <p:nvSpPr>
-          <p:cNvPr id="3" name="TextBox 2"/>
-          <p:cNvSpPr txBox="1"/>
-          <p:nvPr/>
-        </p:nvSpPr>
-        <p:spPr>
-          <a:xfrm>
-            <a:off x="566928" y="2229993"/>
-            <a:ext cx="11057839" cy="254000"/>
+            <a:off x="566928" y="146304"/>
+            <a:ext cx="11057839" cy="457200"/>
           </a:xfrm>
           <a:prstGeom prst="rect">
             <a:avLst/>
@@ -13187,30 +12532,60 @@
           </a:bodyPr>
           <a:lstStyle/>
           <a:p>
-            <a:r>
-              <a:rPr sz="1600" b="1">
-                <a:solidFill>
-                  <a:srgbClr val="5C7268"/>
-                </a:solidFill>
-                <a:latin typeface="Avenir Next"/>
-                <a:ea typeface="Hiragino Sans"/>
-                <a:cs typeface="Hiragino Sans"/>
-              </a:rPr>
-              <a:t>① 風を減速させて取り出す｜上流 v₁ → ロータ面 v → 下流 v₂</a:t>
-            </a:r>
-          </a:p>
-        </p:txBody>
-      </p:sp>
-      <p:sp>
-        <p:nvSpPr>
-          <p:cNvPr id="4" name="TextBox 3"/>
+            <a:pPr>
+              <a:defRPr sz="2400" b="1">
+                <a:solidFill>
+                  <a:srgbClr val="7C332A"/>
+                </a:solidFill>
+                <a:latin typeface="Avenir Next"/>
+                <a:ea typeface="Hiragino Sans"/>
+                <a:cs typeface="Hiragino Sans"/>
+              </a:defRPr>
+            </a:pPr>
+            <a:r>
+              <a:rPr>
+                <a:ea typeface="Hiragino Sans"/>
+                <a:cs typeface="Hiragino Sans"/>
+              </a:rPr>
+              <a:t>導出 — ベッツの限界（運動量理論）</a:t>
+            </a:r>
+          </a:p>
+        </p:txBody>
+      </p:sp>
+      <p:pic>
+        <p:nvPicPr>
+          <p:cNvPr id="3" name="Picture 2" descr="ch01_deriv_betz_3.png"/>
+          <p:cNvPicPr>
+            <a:picLocks noChangeAspect="1"/>
+          </p:cNvPicPr>
+          <p:nvPr/>
+        </p:nvPicPr>
+        <p:blipFill>
+          <a:blip r:embed="rId2"/>
+          <a:stretch>
+            <a:fillRect/>
+          </a:stretch>
+        </p:blipFill>
+        <p:spPr>
+          <a:xfrm>
+            <a:off x="815410" y="713232"/>
+            <a:ext cx="10560875" cy="5322316"/>
+          </a:xfrm>
+          <a:prstGeom prst="rect">
+            <a:avLst/>
+          </a:prstGeom>
+        </p:spPr>
+      </p:pic>
+      <p:sp>
+        <p:nvSpPr>
+          <p:cNvPr id="4" name="edge:caption"/>
           <p:cNvSpPr txBox="1"/>
           <p:nvPr/>
         </p:nvSpPr>
         <p:spPr>
           <a:xfrm>
-            <a:off x="822960" y="2522093"/>
-            <a:ext cx="10801807" cy="385762"/>
+            <a:off x="228600" y="6090412"/>
+            <a:ext cx="11734495" cy="520700"/>
           </a:xfrm>
           <a:prstGeom prst="rect">
             <a:avLst/>
@@ -13223,314 +12598,24 @@
           </a:bodyPr>
           <a:lstStyle/>
           <a:p>
-            <a:pPr>
-              <a:lnSpc>
-                <a:spcPct val="130000"/>
-              </a:lnSpc>
-            </a:pPr>
-            <a:r>
-              <a:rPr sz="1500">
-                <a:solidFill>
-                  <a:srgbClr val="33221E"/>
-                </a:solidFill>
-                <a:latin typeface="Avenir Next"/>
-                <a:ea typeface="Hiragino Sans"/>
-                <a:cs typeface="Hiragino Sans"/>
-              </a:rPr>
-              <a:t>ロータ面の風速は上下流の平均 v = (v₁ + v₂)/2。減速の割合を a = (v₁ − v)/v₁ とおく（誘導係数）。</a:t>
-            </a:r>
-          </a:p>
-        </p:txBody>
-      </p:sp>
-      <p:sp>
-        <p:nvSpPr>
-          <p:cNvPr id="5" name="Rectangle 4"/>
-          <p:cNvSpPr/>
-          <p:nvPr/>
-        </p:nvSpPr>
-        <p:spPr>
-          <a:xfrm>
-            <a:off x="566928" y="3059747"/>
-            <a:ext cx="11057839" cy="9525"/>
-          </a:xfrm>
-          <a:prstGeom prst="rect">
-            <a:avLst/>
-          </a:prstGeom>
-          <a:solidFill>
-            <a:srgbClr val="E5DCCE"/>
-          </a:solidFill>
-          <a:ln>
-            <a:noFill/>
-          </a:ln>
-          <a:effectLst/>
-        </p:spPr>
-        <p:style>
-          <a:lnRef idx="1">
-            <a:schemeClr val="accent1"/>
-          </a:lnRef>
-          <a:fillRef idx="3">
-            <a:schemeClr val="accent1"/>
-          </a:fillRef>
-          <a:effectRef idx="2">
-            <a:schemeClr val="accent1"/>
-          </a:effectRef>
-          <a:fontRef idx="minor">
-            <a:schemeClr val="lt1"/>
-          </a:fontRef>
-        </p:style>
-        <p:txBody>
-          <a:bodyPr rtlCol="0" anchor="ctr"/>
-          <a:lstStyle/>
-          <a:p>
             <a:pPr algn="ctr"/>
-          </a:p>
-        </p:txBody>
-      </p:sp>
-      <p:sp>
-        <p:nvSpPr>
-          <p:cNvPr id="6" name="TextBox 5"/>
-          <p:cNvSpPr txBox="1"/>
-          <p:nvPr/>
-        </p:nvSpPr>
-        <p:spPr>
-          <a:xfrm>
-            <a:off x="566928" y="3237039"/>
-            <a:ext cx="11057839" cy="254000"/>
-          </a:xfrm>
-          <a:prstGeom prst="rect">
-            <a:avLst/>
-          </a:prstGeom>
-          <a:noFill/>
-        </p:spPr>
-        <p:txBody>
-          <a:bodyPr wrap="none" lIns="0" rIns="0" tIns="0" bIns="0">
-            <a:noAutofit/>
-          </a:bodyPr>
-          <a:lstStyle/>
-          <a:p>
-            <a:r>
-              <a:rPr sz="1600" b="1">
-                <a:solidFill>
-                  <a:srgbClr val="5C7268"/>
-                </a:solidFill>
-                <a:latin typeface="Avenir Next"/>
-                <a:ea typeface="Hiragino Sans"/>
-                <a:cs typeface="Hiragino Sans"/>
-              </a:rPr>
-              <a:t>② 取り出す仕事率｜P = 力 × 速度 = ρAv(v₁ − v₂) × v</a:t>
-            </a:r>
-          </a:p>
-        </p:txBody>
-      </p:sp>
-      <p:sp>
-        <p:nvSpPr>
-          <p:cNvPr id="7" name="TextBox 6"/>
-          <p:cNvSpPr txBox="1"/>
-          <p:nvPr/>
-        </p:nvSpPr>
-        <p:spPr>
-          <a:xfrm>
-            <a:off x="822960" y="3529139"/>
-            <a:ext cx="10801807" cy="385762"/>
-          </a:xfrm>
-          <a:prstGeom prst="rect">
-            <a:avLst/>
-          </a:prstGeom>
-          <a:noFill/>
-        </p:spPr>
-        <p:txBody>
-          <a:bodyPr wrap="square" lIns="0" rIns="0" tIns="0" bIns="0">
-            <a:noAutofit/>
-          </a:bodyPr>
-          <a:lstStyle/>
-          <a:p>
-            <a:pPr>
-              <a:lnSpc>
-                <a:spcPct val="130000"/>
-              </a:lnSpc>
-            </a:pPr>
-            <a:r>
-              <a:rPr sz="1500">
-                <a:solidFill>
-                  <a:srgbClr val="33221E"/>
-                </a:solidFill>
-                <a:latin typeface="Avenir Next"/>
-                <a:ea typeface="Hiragino Sans"/>
-                <a:cs typeface="Hiragino Sans"/>
-              </a:rPr>
-              <a:t>v₂ = v₁(1 − 2a) を代入すると </a:t>
-            </a:r>
-            <a:r>
-              <a:rPr sz="1500" b="1">
-                <a:solidFill>
-                  <a:srgbClr val="33221E"/>
-                </a:solidFill>
-                <a:latin typeface="Avenir Next"/>
-                <a:ea typeface="Hiragino Sans"/>
-                <a:cs typeface="Hiragino Sans"/>
-              </a:rPr>
-              <a:t>P = ½ρA v₁³ · 4a(1 − a)²</a:t>
-            </a:r>
-            <a:r>
-              <a:rPr sz="1500">
-                <a:solidFill>
-                  <a:srgbClr val="33221E"/>
-                </a:solidFill>
-                <a:latin typeface="Avenir Next"/>
-                <a:ea typeface="Hiragino Sans"/>
-                <a:cs typeface="Hiragino Sans"/>
-              </a:rPr>
-              <a:t>。C_p(a) = 4a(1 − a)² が「取り出せる割合」。</a:t>
-            </a:r>
-          </a:p>
-        </p:txBody>
-      </p:sp>
-      <p:sp>
-        <p:nvSpPr>
-          <p:cNvPr id="8" name="Rectangle 7"/>
-          <p:cNvSpPr/>
-          <p:nvPr/>
-        </p:nvSpPr>
-        <p:spPr>
-          <a:xfrm>
-            <a:off x="566928" y="4066793"/>
-            <a:ext cx="11057839" cy="9525"/>
-          </a:xfrm>
-          <a:prstGeom prst="rect">
-            <a:avLst/>
-          </a:prstGeom>
-          <a:solidFill>
-            <a:srgbClr val="E5DCCE"/>
-          </a:solidFill>
-          <a:ln>
-            <a:noFill/>
-          </a:ln>
-          <a:effectLst/>
-        </p:spPr>
-        <p:style>
-          <a:lnRef idx="1">
-            <a:schemeClr val="accent1"/>
-          </a:lnRef>
-          <a:fillRef idx="3">
-            <a:schemeClr val="accent1"/>
-          </a:fillRef>
-          <a:effectRef idx="2">
-            <a:schemeClr val="accent1"/>
-          </a:effectRef>
-          <a:fontRef idx="minor">
-            <a:schemeClr val="lt1"/>
-          </a:fontRef>
-        </p:style>
-        <p:txBody>
-          <a:bodyPr rtlCol="0" anchor="ctr"/>
-          <a:lstStyle/>
-          <a:p>
-            <a:pPr algn="ctr"/>
-          </a:p>
-        </p:txBody>
-      </p:sp>
-      <p:sp>
-        <p:nvSpPr>
-          <p:cNvPr id="9" name="TextBox 8"/>
-          <p:cNvSpPr txBox="1"/>
-          <p:nvPr/>
-        </p:nvSpPr>
-        <p:spPr>
-          <a:xfrm>
-            <a:off x="566928" y="4244085"/>
-            <a:ext cx="11057839" cy="254000"/>
-          </a:xfrm>
-          <a:prstGeom prst="rect">
-            <a:avLst/>
-          </a:prstGeom>
-          <a:noFill/>
-        </p:spPr>
-        <p:txBody>
-          <a:bodyPr wrap="none" lIns="0" rIns="0" tIns="0" bIns="0">
-            <a:noAutofit/>
-          </a:bodyPr>
-          <a:lstStyle/>
-          <a:p>
-            <a:r>
-              <a:rPr sz="1600" b="1">
-                <a:solidFill>
-                  <a:srgbClr val="5C7268"/>
-                </a:solidFill>
-                <a:latin typeface="Avenir Next"/>
-                <a:ea typeface="Hiragino Sans"/>
-                <a:cs typeface="Hiragino Sans"/>
-              </a:rPr>
-              <a:t>③ 最大化｜dC_p/da = 0 → a = 1/3</a:t>
-            </a:r>
-          </a:p>
-        </p:txBody>
-      </p:sp>
-      <p:sp>
-        <p:nvSpPr>
-          <p:cNvPr id="10" name="TextBox 9"/>
-          <p:cNvSpPr txBox="1"/>
-          <p:nvPr/>
-        </p:nvSpPr>
-        <p:spPr>
-          <a:xfrm>
-            <a:off x="822960" y="4536185"/>
-            <a:ext cx="10801807" cy="695325"/>
-          </a:xfrm>
-          <a:prstGeom prst="rect">
-            <a:avLst/>
-          </a:prstGeom>
-          <a:noFill/>
-        </p:spPr>
-        <p:txBody>
-          <a:bodyPr wrap="square" lIns="0" rIns="0" tIns="0" bIns="0">
-            <a:noAutofit/>
-          </a:bodyPr>
-          <a:lstStyle/>
-          <a:p>
-            <a:pPr>
-              <a:lnSpc>
-                <a:spcPct val="130000"/>
-              </a:lnSpc>
-            </a:pPr>
-            <a:r>
-              <a:rPr sz="1500">
-                <a:solidFill>
-                  <a:srgbClr val="33221E"/>
-                </a:solidFill>
-                <a:latin typeface="Avenir Next"/>
-                <a:ea typeface="Hiragino Sans"/>
-                <a:cs typeface="Hiragino Sans"/>
-              </a:rPr>
-              <a:t>C_p,max = 4 · (1/3) · (2/3)² = </a:t>
-            </a:r>
-            <a:r>
-              <a:rPr sz="1500" b="1">
-                <a:solidFill>
-                  <a:srgbClr val="33221E"/>
-                </a:solidFill>
-                <a:latin typeface="Avenir Next"/>
-                <a:ea typeface="Hiragino Sans"/>
-                <a:cs typeface="Hiragino Sans"/>
-              </a:rPr>
-              <a:t>16/27 = 0.593</a:t>
-            </a:r>
-            <a:r>
-              <a:rPr sz="1500">
-                <a:solidFill>
-                  <a:srgbClr val="33221E"/>
-                </a:solidFill>
-                <a:latin typeface="Avenir Next"/>
-                <a:ea typeface="Hiragino Sans"/>
-                <a:cs typeface="Hiragino Sans"/>
-              </a:rPr>
-              <a:t>。風を止めきると（a = 1/2 で v₂ = 0）後ろに空気が流れ込めず、取れる量は減る。</a:t>
-            </a:r>
-          </a:p>
-        </p:txBody>
-      </p:sp>
-      <p:sp>
-        <p:nvSpPr>
-          <p:cNvPr id="11" name="TextBox 10"/>
+            <a:r>
+              <a:rPr sz="1400">
+                <a:solidFill>
+                  <a:srgbClr val="71635B"/>
+                </a:solidFill>
+                <a:latin typeface="Avenir Next"/>
+                <a:ea typeface="Hiragino Sans"/>
+                <a:cs typeface="Hiragino Sans"/>
+              </a:rPr>
+              <a:t>C_p,max = 4 · (1/3) · (2/3)² = 16/27 = 0.593。風を止めきると（a = 1/2 で v₂ = 0）後ろに空気が流れ込めず、取れる量は減る。　出典｜コード/fig_ch01.py</a:t>
+            </a:r>
+          </a:p>
+        </p:txBody>
+      </p:sp>
+      <p:sp>
+        <p:nvSpPr>
+          <p:cNvPr id="5" name="TextBox 4"/>
           <p:cNvSpPr txBox="1"/>
           <p:nvPr/>
         </p:nvSpPr>
